--- a/proyecto/entregables/semana-05/Presentacion_Fist_of_Five/Presentacion_Fist_of_Five.pptx
+++ b/proyecto/entregables/semana-05/Presentacion_Fist_of_Five/Presentacion_Fist_of_Five.pptx
@@ -11,9 +11,11 @@
     <p:sldId id="259" r:id="rId5"/>
     <p:sldId id="260" r:id="rId6"/>
     <p:sldId id="261" r:id="rId7"/>
+    <p:sldId id="262" r:id="rId8"/>
+    <p:sldId id="263" r:id="rId9"/>
   </p:sldIdLst>
   <p:notesMasterIdLst>
-    <p:notesMasterId r:id="rId8"/>
+    <p:notesMasterId r:id="rId10"/>
   </p:notesMasterIdLst>
   <p:sldSz cx="9144000" cy="5143500"/>
   <p:notesSz cx="5143500" cy="9144000"/>
@@ -859,7 +861,7 @@
           <a:p>
             <a:r>
               <a:rPr lang="en-US" dirty="0"/>
-              <a:t>Luis. Simulación con una historia real del FGAP040 (épica EP03). Izquierda: estimación. Anthony vota 2 porque creía que solo era mostrar el resultado; Luis vota 5 porque hay que armar secuencias de frames y entrenar el ConvLSTM. Tras explicarse, los dos votan 4: historia grande. Derecha: decisión con los tres. Hay dos votos de 2, así que no se cierra: se decide dividir HU12. Opcional: repetir la votación con el aula.</a:t>
+              <a:t>Luis. Simulación con una historia real de nuestras épicas (FGAP040, épica EP04). Izquierda: estimación. Anthony vota 2 porque creía que solo era mostrar el resultado; Luis vota 5 porque hay que armar secuencias de frames y entrenar el ConvLSTM. Tras explicarse, los dos votan 4: historia grande. Derecha: decisión con los tres. Hay dos votos de 2, así que no se cierra: se decide dividir HU07. Opcional: repetir la votación con el aula.</a:t>
             </a:r>
             <a:endParaRPr lang="en-US" dirty="0"/>
           </a:p>
@@ -947,7 +949,7 @@
           <a:p>
             <a:r>
               <a:rPr lang="en-US" dirty="0"/>
-              <a:t>Albert. Comparación con las otras tres técnicas de estimación del SBOK. El puño de cinco es la más rápida y además sirve para decidir; Planning Poker da más precisión. Cierre: lo importante es que los votos extremos expliquen su razón. Preguntas.</a:t>
+              <a:t>Anthony. Aplicamos el puño de cinco a nuestras doce historias de usuario. Cada número es el tamaño acordado después de votar y de que los extremos explicaran su razón. La más grande es la HU07, procesar el clip con ConvLSTM, que vimos en el ejemplo anterior. Las de carga y configuración son pequeñas. Son votos simulados por el equipo; los reales se toman en la planificación de cada sprint.</a:t>
             </a:r>
             <a:endParaRPr lang="en-US" dirty="0"/>
           </a:p>
@@ -971,6 +973,182 @@
             <a:fld id="{F7021451-1387-4CA6-816F-3879F97B5CBC}" type="slidenum">
               <a:rPr lang="en-US"/>
               <a:t>6</a:t>
+            </a:fld>
+            <a:endParaRPr lang="en-US"/>
+          </a:p>
+        </p:txBody>
+      </p:sp>
+    </p:spTree>
+    <p:extLst>
+      <p:ext uri="{BB962C8B-B14F-4D97-AF65-F5344CB8AC3E}">
+        <p14:creationId xmlns:p14="http://schemas.microsoft.com/office/powerpoint/2010/main" val="1024086991"/>
+      </p:ext>
+    </p:extLst>
+  </p:cSld>
+  <p:clrMapOvr>
+    <a:masterClrMapping/>
+  </p:clrMapOvr>
+</p:notes>
+</file>
+
+<file path=ppt/notesSlides/notesSlide7.xml><?xml version="1.0" encoding="utf-8"?>
+<p:notes xmlns:a="http://schemas.openxmlformats.org/drawingml/2006/main" xmlns:r="http://schemas.openxmlformats.org/officeDocument/2006/relationships" xmlns:p="http://schemas.openxmlformats.org/presentationml/2006/main">
+  <p:cSld>
+    <p:spTree>
+      <p:nvGrpSpPr>
+        <p:cNvPr id="1" name=""/>
+        <p:cNvGrpSpPr/>
+        <p:nvPr/>
+      </p:nvGrpSpPr>
+      <p:grpSpPr>
+        <a:xfrm>
+          <a:off x="0" y="0"/>
+          <a:ext cx="0" cy="0"/>
+          <a:chOff x="0" y="0"/>
+          <a:chExt cx="0" cy="0"/>
+        </a:xfrm>
+      </p:grpSpPr>
+      <p:sp>
+        <p:nvSpPr>
+          <p:cNvPr id="2" name="Slide Image Placeholder 1"/>
+          <p:cNvSpPr>
+            <a:spLocks noGrp="1" noRot="1" noChangeAspect="1"/>
+          </p:cNvSpPr>
+          <p:nvPr>
+            <p:ph type="sldImg"/>
+          </p:nvPr>
+        </p:nvSpPr>
+        <p:spPr/>
+      </p:sp>
+      <p:sp>
+        <p:nvSpPr>
+          <p:cNvPr id="3" name="Notes Placeholder 2"/>
+          <p:cNvSpPr>
+            <a:spLocks noGrp="1"/>
+          </p:cNvSpPr>
+          <p:nvPr>
+            <p:ph type="body" idx="1"/>
+          </p:nvPr>
+        </p:nvSpPr>
+        <p:spPr/>
+        <p:txBody>
+          <a:bodyPr/>
+          <a:lstStyle/>
+          <a:p>
+            <a:r>
+              <a:rPr lang="en-US" dirty="0"/>
+              <a:t>Luis. Usamos el puño de cinco para decidir. Primera: la EP01 entra completa al Sprint 1, votos 5, 4 y 5, aprobado. Segunda: la EP02 y la EP03 juntas en el Sprint 2; hubo dos votos de 3, así que se acepta pero con una revisión a mitad del sprint. Tercera: la EP05 y la EP06 quedan para el Sprint 4, aprobado. La EP04 va en el Sprint 3 y la dividimos, como vimos en el ejemplo. Votos simulados.</a:t>
+            </a:r>
+            <a:endParaRPr lang="en-US" dirty="0"/>
+          </a:p>
+        </p:txBody>
+      </p:sp>
+      <p:sp>
+        <p:nvSpPr>
+          <p:cNvPr id="4" name="Slide Number Placeholder 3"/>
+          <p:cNvSpPr>
+            <a:spLocks noGrp="1"/>
+          </p:cNvSpPr>
+          <p:nvPr>
+            <p:ph type="sldNum" sz="quarter" idx="10"/>
+          </p:nvPr>
+        </p:nvSpPr>
+        <p:spPr/>
+        <p:txBody>
+          <a:bodyPr/>
+          <a:lstStyle/>
+          <a:p>
+            <a:fld id="{F7021451-1387-4CA6-816F-3879F97B5CBC}" type="slidenum">
+              <a:rPr lang="en-US"/>
+              <a:t>7</a:t>
+            </a:fld>
+            <a:endParaRPr lang="en-US"/>
+          </a:p>
+        </p:txBody>
+      </p:sp>
+    </p:spTree>
+    <p:extLst>
+      <p:ext uri="{BB962C8B-B14F-4D97-AF65-F5344CB8AC3E}">
+        <p14:creationId xmlns:p14="http://schemas.microsoft.com/office/powerpoint/2010/main" val="1024086991"/>
+      </p:ext>
+    </p:extLst>
+  </p:cSld>
+  <p:clrMapOvr>
+    <a:masterClrMapping/>
+  </p:clrMapOvr>
+</p:notes>
+</file>
+
+<file path=ppt/notesSlides/notesSlide8.xml><?xml version="1.0" encoding="utf-8"?>
+<p:notes xmlns:a="http://schemas.openxmlformats.org/drawingml/2006/main" xmlns:r="http://schemas.openxmlformats.org/officeDocument/2006/relationships" xmlns:p="http://schemas.openxmlformats.org/presentationml/2006/main">
+  <p:cSld>
+    <p:spTree>
+      <p:nvGrpSpPr>
+        <p:cNvPr id="1" name=""/>
+        <p:cNvGrpSpPr/>
+        <p:nvPr/>
+      </p:nvGrpSpPr>
+      <p:grpSpPr>
+        <a:xfrm>
+          <a:off x="0" y="0"/>
+          <a:ext cx="0" cy="0"/>
+          <a:chOff x="0" y="0"/>
+          <a:chExt cx="0" cy="0"/>
+        </a:xfrm>
+      </p:grpSpPr>
+      <p:sp>
+        <p:nvSpPr>
+          <p:cNvPr id="2" name="Slide Image Placeholder 1"/>
+          <p:cNvSpPr>
+            <a:spLocks noGrp="1" noRot="1" noChangeAspect="1"/>
+          </p:cNvSpPr>
+          <p:nvPr>
+            <p:ph type="sldImg"/>
+          </p:nvPr>
+        </p:nvSpPr>
+        <p:spPr/>
+      </p:sp>
+      <p:sp>
+        <p:nvSpPr>
+          <p:cNvPr id="3" name="Notes Placeholder 2"/>
+          <p:cNvSpPr>
+            <a:spLocks noGrp="1"/>
+          </p:cNvSpPr>
+          <p:nvPr>
+            <p:ph type="body" idx="1"/>
+          </p:nvPr>
+        </p:nvSpPr>
+        <p:spPr/>
+        <p:txBody>
+          <a:bodyPr/>
+          <a:lstStyle/>
+          <a:p>
+            <a:r>
+              <a:rPr lang="en-US" dirty="0"/>
+              <a:t>Albert. Comparación con las otras tres técnicas de estimación del SBOK. El puño de cinco es la más rápida y además sirve para decidir; Planning Poker da más precisión. Cierre: lo importante es que los votos extremos expliquen su razón. Preguntas.</a:t>
+            </a:r>
+            <a:endParaRPr lang="en-US" dirty="0"/>
+          </a:p>
+        </p:txBody>
+      </p:sp>
+      <p:sp>
+        <p:nvSpPr>
+          <p:cNvPr id="4" name="Slide Number Placeholder 3"/>
+          <p:cNvSpPr>
+            <a:spLocks noGrp="1"/>
+          </p:cNvSpPr>
+          <p:nvPr>
+            <p:ph type="sldNum" sz="quarter" idx="10"/>
+          </p:nvPr>
+        </p:nvSpPr>
+        <p:spPr/>
+        <p:txBody>
+          <a:bodyPr/>
+          <a:lstStyle/>
+          <a:p>
+            <a:fld id="{F7021451-1387-4CA6-816F-3879F97B5CBC}" type="slidenum">
+              <a:rPr lang="en-US"/>
+              <a:t>8</a:t>
             </a:fld>
             <a:endParaRPr lang="en-US"/>
           </a:p>
@@ -5207,7 +5385,7 @@
                 <a:ea typeface="Calibri" pitchFamily="34" charset="-122"/>
                 <a:cs typeface="Calibri" pitchFamily="34" charset="-120"/>
               </a:rPr>
-              <a:t>Ejemplo: HU12 «Clasificar la conducta»</a:t>
+              <a:t>Ejemplo: HU07 «Procesar el clip con ConvLSTM»</a:t>
             </a:r>
             <a:endParaRPr lang="en-US" sz="3000" dirty="0"/>
           </a:p>
@@ -5246,7 +5424,7 @@
                 <a:ea typeface="Calibri" pitchFamily="34" charset="-122"/>
                 <a:cs typeface="Calibri" pitchFamily="34" charset="-120"/>
               </a:rPr>
-              <a:t>Épica EP03 · Detección de conductas inseguras · simulación del equipo NewBit</a:t>
+              <a:t>Épica EP04 · Clasificación espacio-temporal (ConvLSTM) · simulación del equipo NewBit</a:t>
             </a:r>
             <a:endParaRPr lang="en-US" sz="1200" dirty="0"/>
           </a:p>
@@ -6497,7 +6675,7 @@
                 <a:ea typeface="Calibri" pitchFamily="34" charset="-122"/>
                 <a:cs typeface="Calibri" pitchFamily="34" charset="-120"/>
               </a:rPr>
-              <a:t>¿HU12 entra completa al Sprint 1?</a:t>
+              <a:t>¿HU07 entra completa al Sprint 3?</a:t>
             </a:r>
             <a:endParaRPr lang="en-US" sz="1400" dirty="0"/>
           </a:p>
@@ -7127,7 +7305,7 @@
                 <a:ea typeface="Calibri" pitchFamily="34" charset="-122"/>
                 <a:cs typeface="Calibri" pitchFamily="34" charset="-120"/>
               </a:rPr>
-              <a:t>Decisión: dividir HU12 en dos historias.</a:t>
+              <a:t>Decisión: dividir HU07 en dos historias.</a:t>
             </a:r>
             <a:endParaRPr lang="en-US" sz="1200" dirty="0"/>
           </a:p>
@@ -7241,6 +7419,4793 @@
                 <a:ea typeface="Calibri" pitchFamily="34" charset="-122"/>
                 <a:cs typeface="Calibri" pitchFamily="34" charset="-120"/>
               </a:rPr>
+              <a:t>Estimamos las 12 historias de NewBit</a:t>
+            </a:r>
+            <a:endParaRPr lang="en-US" sz="3000" dirty="0"/>
+          </a:p>
+        </p:txBody>
+      </p:sp>
+      <p:sp>
+        <p:nvSpPr>
+          <p:cNvPr id="3" name="obj172"/>
+          <p:cNvSpPr txBox="1"/>
+          <p:nvPr/>
+        </p:nvSpPr>
+        <p:spPr>
+          <a:xfrm>
+            <a:off x="548640" y="1024128"/>
+            <a:ext cx="8046720" cy="274320"/>
+          </a:xfrm>
+          <a:prstGeom prst="rect">
+            <a:avLst/>
+          </a:prstGeom>
+          <a:noFill/>
+          <a:ln/>
+        </p:spPr>
+        <p:txBody>
+          <a:bodyPr wrap="square" lIns="0" tIns="0" rIns="0" bIns="0" rtlCol="0" anchor="t"/>
+          <a:lstStyle/>
+          <a:p>
+            <a:pPr algn="l" indent="0" marL="0">
+              <a:buNone/>
+            </a:pPr>
+            <a:r>
+              <a:rPr lang="en-US" sz="1200" dirty="0">
+                <a:solidFill>
+                  <a:srgbClr val="6B7280"/>
+                </a:solidFill>
+                <a:latin typeface="Calibri" pitchFamily="34" charset="0"/>
+                <a:ea typeface="Calibri" pitchFamily="34" charset="-122"/>
+                <a:cs typeface="Calibri" pitchFamily="34" charset="-120"/>
+              </a:rPr>
+              <a:t>Nuestras 12 historias (FGAP040, épicas EP01–EP06) · tamaño acordado tras votar · 1 = muy pequeña, 5 = muy grande</a:t>
+            </a:r>
+            <a:endParaRPr lang="en-US" sz="1200" dirty="0"/>
+          </a:p>
+        </p:txBody>
+      </p:sp>
+      <p:sp>
+        <p:nvSpPr>
+          <p:cNvPr id="4" name="obj173"/>
+          <p:cNvSpPr/>
+          <p:nvPr/>
+        </p:nvSpPr>
+        <p:spPr>
+          <a:xfrm>
+            <a:off x="548640" y="1371600"/>
+            <a:ext cx="1874520" cy="914400"/>
+          </a:xfrm>
+          <a:prstGeom prst="roundRect">
+            <a:avLst>
+              <a:gd name="adj" fmla="val 14000"/>
+            </a:avLst>
+          </a:prstGeom>
+          <a:solidFill>
+            <a:srgbClr val="F4F4F2"/>
+          </a:solidFill>
+          <a:ln/>
+        </p:spPr>
+      </p:sp>
+      <p:sp>
+        <p:nvSpPr>
+          <p:cNvPr id="5" name="obj174"/>
+          <p:cNvSpPr txBox="1"/>
+          <p:nvPr/>
+        </p:nvSpPr>
+        <p:spPr>
+          <a:xfrm>
+            <a:off x="685800" y="1463040"/>
+            <a:ext cx="1188720" cy="228600"/>
+          </a:xfrm>
+          <a:prstGeom prst="rect">
+            <a:avLst/>
+          </a:prstGeom>
+          <a:noFill/>
+          <a:ln/>
+        </p:spPr>
+        <p:txBody>
+          <a:bodyPr wrap="square" lIns="0" tIns="0" rIns="0" bIns="0" rtlCol="0" anchor="t"/>
+          <a:lstStyle/>
+          <a:p>
+            <a:pPr algn="l" indent="0" marL="0">
+              <a:buNone/>
+            </a:pPr>
+            <a:r>
+              <a:rPr lang="en-US" sz="1100" b="1" dirty="0">
+                <a:solidFill>
+                  <a:srgbClr val="F2643D"/>
+                </a:solidFill>
+                <a:latin typeface="Calibri" pitchFamily="34" charset="0"/>
+                <a:ea typeface="Calibri" pitchFamily="34" charset="-122"/>
+                <a:cs typeface="Calibri" pitchFamily="34" charset="-120"/>
+              </a:rPr>
+              <a:t>HU01</a:t>
+            </a:r>
+            <a:pPr algn="l" indent="0" marL="0">
+              <a:buNone/>
+            </a:pPr>
+            <a:r>
+              <a:rPr lang="en-US" sz="1100" dirty="0">
+                <a:solidFill>
+                  <a:srgbClr val="F2643D"/>
+                </a:solidFill>
+                <a:latin typeface="Calibri" pitchFamily="34" charset="0"/>
+                <a:ea typeface="Calibri" pitchFamily="34" charset="-122"/>
+                <a:cs typeface="Calibri" pitchFamily="34" charset="-120"/>
+              </a:rPr>
+              <a:t> · EP01</a:t>
+            </a:r>
+            <a:endParaRPr lang="en-US" sz="1100" dirty="0"/>
+          </a:p>
+        </p:txBody>
+      </p:sp>
+      <p:sp>
+        <p:nvSpPr>
+          <p:cNvPr id="6" name="obj175"/>
+          <p:cNvSpPr txBox="1"/>
+          <p:nvPr/>
+        </p:nvSpPr>
+        <p:spPr>
+          <a:xfrm>
+            <a:off x="685800" y="1700784"/>
+            <a:ext cx="1207008" cy="530352"/>
+          </a:xfrm>
+          <a:prstGeom prst="rect">
+            <a:avLst/>
+          </a:prstGeom>
+          <a:noFill/>
+          <a:ln/>
+        </p:spPr>
+        <p:txBody>
+          <a:bodyPr wrap="square" lIns="0" tIns="0" rIns="0" bIns="0" rtlCol="0" anchor="t"/>
+          <a:lstStyle/>
+          <a:p>
+            <a:pPr algn="l" indent="0" marL="0">
+              <a:buNone/>
+            </a:pPr>
+            <a:r>
+              <a:rPr lang="en-US" sz="1100" dirty="0">
+                <a:solidFill>
+                  <a:srgbClr val="1F2421"/>
+                </a:solidFill>
+                <a:latin typeface="Calibri" pitchFamily="34" charset="0"/>
+                <a:ea typeface="Calibri" pitchFamily="34" charset="-122"/>
+                <a:cs typeface="Calibri" pitchFamily="34" charset="-120"/>
+              </a:rPr>
+              <a:t>Cargar un video industrial</a:t>
+            </a:r>
+            <a:endParaRPr lang="en-US" sz="1100" dirty="0"/>
+          </a:p>
+        </p:txBody>
+      </p:sp>
+      <p:sp>
+        <p:nvSpPr>
+          <p:cNvPr id="7" name="obj176"/>
+          <p:cNvSpPr/>
+          <p:nvPr/>
+        </p:nvSpPr>
+        <p:spPr>
+          <a:xfrm>
+            <a:off x="1920240" y="1600200"/>
+            <a:ext cx="402336" cy="402336"/>
+          </a:xfrm>
+          <a:prstGeom prst="roundRect">
+            <a:avLst>
+              <a:gd name="adj" fmla="val 50000"/>
+            </a:avLst>
+          </a:prstGeom>
+          <a:solidFill>
+            <a:srgbClr val="F2643D">
+              <a:alpha val="28000"/>
+            </a:srgbClr>
+          </a:solidFill>
+          <a:ln/>
+        </p:spPr>
+      </p:sp>
+      <p:sp>
+        <p:nvSpPr>
+          <p:cNvPr id="8" name="obj177"/>
+          <p:cNvSpPr txBox="1"/>
+          <p:nvPr/>
+        </p:nvSpPr>
+        <p:spPr>
+          <a:xfrm>
+            <a:off x="1920240" y="1600200"/>
+            <a:ext cx="402336" cy="402336"/>
+          </a:xfrm>
+          <a:prstGeom prst="rect">
+            <a:avLst/>
+          </a:prstGeom>
+          <a:noFill/>
+          <a:ln/>
+        </p:spPr>
+        <p:txBody>
+          <a:bodyPr wrap="square" lIns="0" tIns="0" rIns="0" bIns="0" rtlCol="0" anchor="ctr"/>
+          <a:lstStyle/>
+          <a:p>
+            <a:pPr algn="ctr" indent="0" marL="0">
+              <a:buNone/>
+            </a:pPr>
+            <a:r>
+              <a:rPr lang="en-US" sz="1600" b="1" dirty="0">
+                <a:solidFill>
+                  <a:srgbClr val="1F2421"/>
+                </a:solidFill>
+                <a:latin typeface="Calibri" pitchFamily="34" charset="0"/>
+                <a:ea typeface="Calibri" pitchFamily="34" charset="-122"/>
+                <a:cs typeface="Calibri" pitchFamily="34" charset="-120"/>
+              </a:rPr>
+              <a:t>1</a:t>
+            </a:r>
+            <a:endParaRPr lang="en-US" sz="1600" dirty="0"/>
+          </a:p>
+        </p:txBody>
+      </p:sp>
+      <p:sp>
+        <p:nvSpPr>
+          <p:cNvPr id="9" name="obj178"/>
+          <p:cNvSpPr/>
+          <p:nvPr/>
+        </p:nvSpPr>
+        <p:spPr>
+          <a:xfrm>
+            <a:off x="2606040" y="1371600"/>
+            <a:ext cx="1874520" cy="914400"/>
+          </a:xfrm>
+          <a:prstGeom prst="roundRect">
+            <a:avLst>
+              <a:gd name="adj" fmla="val 14000"/>
+            </a:avLst>
+          </a:prstGeom>
+          <a:solidFill>
+            <a:srgbClr val="F4F4F2"/>
+          </a:solidFill>
+          <a:ln/>
+        </p:spPr>
+      </p:sp>
+      <p:sp>
+        <p:nvSpPr>
+          <p:cNvPr id="10" name="obj179"/>
+          <p:cNvSpPr txBox="1"/>
+          <p:nvPr/>
+        </p:nvSpPr>
+        <p:spPr>
+          <a:xfrm>
+            <a:off x="2743200" y="1463040"/>
+            <a:ext cx="1188720" cy="228600"/>
+          </a:xfrm>
+          <a:prstGeom prst="rect">
+            <a:avLst/>
+          </a:prstGeom>
+          <a:noFill/>
+          <a:ln/>
+        </p:spPr>
+        <p:txBody>
+          <a:bodyPr wrap="square" lIns="0" tIns="0" rIns="0" bIns="0" rtlCol="0" anchor="t"/>
+          <a:lstStyle/>
+          <a:p>
+            <a:pPr algn="l" indent="0" marL="0">
+              <a:buNone/>
+            </a:pPr>
+            <a:r>
+              <a:rPr lang="en-US" sz="1100" b="1" dirty="0">
+                <a:solidFill>
+                  <a:srgbClr val="F2643D"/>
+                </a:solidFill>
+                <a:latin typeface="Calibri" pitchFamily="34" charset="0"/>
+                <a:ea typeface="Calibri" pitchFamily="34" charset="-122"/>
+                <a:cs typeface="Calibri" pitchFamily="34" charset="-120"/>
+              </a:rPr>
+              <a:t>HU02</a:t>
+            </a:r>
+            <a:pPr algn="l" indent="0" marL="0">
+              <a:buNone/>
+            </a:pPr>
+            <a:r>
+              <a:rPr lang="en-US" sz="1100" dirty="0">
+                <a:solidFill>
+                  <a:srgbClr val="F2643D"/>
+                </a:solidFill>
+                <a:latin typeface="Calibri" pitchFamily="34" charset="0"/>
+                <a:ea typeface="Calibri" pitchFamily="34" charset="-122"/>
+                <a:cs typeface="Calibri" pitchFamily="34" charset="-120"/>
+              </a:rPr>
+              <a:t> · EP01</a:t>
+            </a:r>
+            <a:endParaRPr lang="en-US" sz="1100" dirty="0"/>
+          </a:p>
+        </p:txBody>
+      </p:sp>
+      <p:sp>
+        <p:nvSpPr>
+          <p:cNvPr id="11" name="obj180"/>
+          <p:cNvSpPr txBox="1"/>
+          <p:nvPr/>
+        </p:nvSpPr>
+        <p:spPr>
+          <a:xfrm>
+            <a:off x="2743200" y="1700784"/>
+            <a:ext cx="1207008" cy="530352"/>
+          </a:xfrm>
+          <a:prstGeom prst="rect">
+            <a:avLst/>
+          </a:prstGeom>
+          <a:noFill/>
+          <a:ln/>
+        </p:spPr>
+        <p:txBody>
+          <a:bodyPr wrap="square" lIns="0" tIns="0" rIns="0" bIns="0" rtlCol="0" anchor="t"/>
+          <a:lstStyle/>
+          <a:p>
+            <a:pPr algn="l" indent="0" marL="0">
+              <a:buNone/>
+            </a:pPr>
+            <a:r>
+              <a:rPr lang="en-US" sz="1100" dirty="0">
+                <a:solidFill>
+                  <a:srgbClr val="1F2421"/>
+                </a:solidFill>
+                <a:latin typeface="Calibri" pitchFamily="34" charset="0"/>
+                <a:ea typeface="Calibri" pitchFamily="34" charset="-122"/>
+                <a:cs typeface="Calibri" pitchFamily="34" charset="-120"/>
+              </a:rPr>
+              <a:t>Fragmentar el video en frames</a:t>
+            </a:r>
+            <a:endParaRPr lang="en-US" sz="1100" dirty="0"/>
+          </a:p>
+        </p:txBody>
+      </p:sp>
+      <p:sp>
+        <p:nvSpPr>
+          <p:cNvPr id="12" name="obj181"/>
+          <p:cNvSpPr/>
+          <p:nvPr/>
+        </p:nvSpPr>
+        <p:spPr>
+          <a:xfrm>
+            <a:off x="3977640" y="1600200"/>
+            <a:ext cx="402336" cy="402336"/>
+          </a:xfrm>
+          <a:prstGeom prst="roundRect">
+            <a:avLst>
+              <a:gd name="adj" fmla="val 50000"/>
+            </a:avLst>
+          </a:prstGeom>
+          <a:solidFill>
+            <a:srgbClr val="F2643D">
+              <a:alpha val="45000"/>
+            </a:srgbClr>
+          </a:solidFill>
+          <a:ln/>
+        </p:spPr>
+      </p:sp>
+      <p:sp>
+        <p:nvSpPr>
+          <p:cNvPr id="13" name="obj182"/>
+          <p:cNvSpPr txBox="1"/>
+          <p:nvPr/>
+        </p:nvSpPr>
+        <p:spPr>
+          <a:xfrm>
+            <a:off x="3977640" y="1600200"/>
+            <a:ext cx="402336" cy="402336"/>
+          </a:xfrm>
+          <a:prstGeom prst="rect">
+            <a:avLst/>
+          </a:prstGeom>
+          <a:noFill/>
+          <a:ln/>
+        </p:spPr>
+        <p:txBody>
+          <a:bodyPr wrap="square" lIns="0" tIns="0" rIns="0" bIns="0" rtlCol="0" anchor="ctr"/>
+          <a:lstStyle/>
+          <a:p>
+            <a:pPr algn="ctr" indent="0" marL="0">
+              <a:buNone/>
+            </a:pPr>
+            <a:r>
+              <a:rPr lang="en-US" sz="1600" b="1" dirty="0">
+                <a:solidFill>
+                  <a:srgbClr val="1F2421"/>
+                </a:solidFill>
+                <a:latin typeface="Calibri" pitchFamily="34" charset="0"/>
+                <a:ea typeface="Calibri" pitchFamily="34" charset="-122"/>
+                <a:cs typeface="Calibri" pitchFamily="34" charset="-120"/>
+              </a:rPr>
+              <a:t>2</a:t>
+            </a:r>
+            <a:endParaRPr lang="en-US" sz="1600" dirty="0"/>
+          </a:p>
+        </p:txBody>
+      </p:sp>
+      <p:sp>
+        <p:nvSpPr>
+          <p:cNvPr id="14" name="obj183"/>
+          <p:cNvSpPr/>
+          <p:nvPr/>
+        </p:nvSpPr>
+        <p:spPr>
+          <a:xfrm>
+            <a:off x="4663440" y="1371600"/>
+            <a:ext cx="1874520" cy="914400"/>
+          </a:xfrm>
+          <a:prstGeom prst="roundRect">
+            <a:avLst>
+              <a:gd name="adj" fmla="val 14000"/>
+            </a:avLst>
+          </a:prstGeom>
+          <a:solidFill>
+            <a:srgbClr val="F4F4F2"/>
+          </a:solidFill>
+          <a:ln/>
+        </p:spPr>
+      </p:sp>
+      <p:sp>
+        <p:nvSpPr>
+          <p:cNvPr id="15" name="obj184"/>
+          <p:cNvSpPr txBox="1"/>
+          <p:nvPr/>
+        </p:nvSpPr>
+        <p:spPr>
+          <a:xfrm>
+            <a:off x="4800600" y="1463040"/>
+            <a:ext cx="1188720" cy="228600"/>
+          </a:xfrm>
+          <a:prstGeom prst="rect">
+            <a:avLst/>
+          </a:prstGeom>
+          <a:noFill/>
+          <a:ln/>
+        </p:spPr>
+        <p:txBody>
+          <a:bodyPr wrap="square" lIns="0" tIns="0" rIns="0" bIns="0" rtlCol="0" anchor="t"/>
+          <a:lstStyle/>
+          <a:p>
+            <a:pPr algn="l" indent="0" marL="0">
+              <a:buNone/>
+            </a:pPr>
+            <a:r>
+              <a:rPr lang="en-US" sz="1100" b="1" dirty="0">
+                <a:solidFill>
+                  <a:srgbClr val="F2643D"/>
+                </a:solidFill>
+                <a:latin typeface="Calibri" pitchFamily="34" charset="0"/>
+                <a:ea typeface="Calibri" pitchFamily="34" charset="-122"/>
+                <a:cs typeface="Calibri" pitchFamily="34" charset="-120"/>
+              </a:rPr>
+              <a:t>HU03</a:t>
+            </a:r>
+            <a:pPr algn="l" indent="0" marL="0">
+              <a:buNone/>
+            </a:pPr>
+            <a:r>
+              <a:rPr lang="en-US" sz="1100" dirty="0">
+                <a:solidFill>
+                  <a:srgbClr val="F2643D"/>
+                </a:solidFill>
+                <a:latin typeface="Calibri" pitchFamily="34" charset="0"/>
+                <a:ea typeface="Calibri" pitchFamily="34" charset="-122"/>
+                <a:cs typeface="Calibri" pitchFamily="34" charset="-120"/>
+              </a:rPr>
+              <a:t> · EP02</a:t>
+            </a:r>
+            <a:endParaRPr lang="en-US" sz="1100" dirty="0"/>
+          </a:p>
+        </p:txBody>
+      </p:sp>
+      <p:sp>
+        <p:nvSpPr>
+          <p:cNvPr id="16" name="obj185"/>
+          <p:cNvSpPr txBox="1"/>
+          <p:nvPr/>
+        </p:nvSpPr>
+        <p:spPr>
+          <a:xfrm>
+            <a:off x="4800600" y="1700784"/>
+            <a:ext cx="1207008" cy="530352"/>
+          </a:xfrm>
+          <a:prstGeom prst="rect">
+            <a:avLst/>
+          </a:prstGeom>
+          <a:noFill/>
+          <a:ln/>
+        </p:spPr>
+        <p:txBody>
+          <a:bodyPr wrap="square" lIns="0" tIns="0" rIns="0" bIns="0" rtlCol="0" anchor="t"/>
+          <a:lstStyle/>
+          <a:p>
+            <a:pPr algn="l" indent="0" marL="0">
+              <a:buNone/>
+            </a:pPr>
+            <a:r>
+              <a:rPr lang="en-US" sz="1100" dirty="0">
+                <a:solidFill>
+                  <a:srgbClr val="1F2421"/>
+                </a:solidFill>
+                <a:latin typeface="Calibri" pitchFamily="34" charset="0"/>
+                <a:ea typeface="Calibri" pitchFamily="34" charset="-122"/>
+                <a:cs typeface="Calibri" pitchFamily="34" charset="-120"/>
+              </a:rPr>
+              <a:t>Detectar trabajadores con YOLOv4</a:t>
+            </a:r>
+            <a:endParaRPr lang="en-US" sz="1100" dirty="0"/>
+          </a:p>
+        </p:txBody>
+      </p:sp>
+      <p:sp>
+        <p:nvSpPr>
+          <p:cNvPr id="17" name="obj186"/>
+          <p:cNvSpPr/>
+          <p:nvPr/>
+        </p:nvSpPr>
+        <p:spPr>
+          <a:xfrm>
+            <a:off x="6035040" y="1600200"/>
+            <a:ext cx="402336" cy="402336"/>
+          </a:xfrm>
+          <a:prstGeom prst="roundRect">
+            <a:avLst>
+              <a:gd name="adj" fmla="val 50000"/>
+            </a:avLst>
+          </a:prstGeom>
+          <a:solidFill>
+            <a:srgbClr val="F2643D">
+              <a:alpha val="65000"/>
+            </a:srgbClr>
+          </a:solidFill>
+          <a:ln/>
+        </p:spPr>
+      </p:sp>
+      <p:sp>
+        <p:nvSpPr>
+          <p:cNvPr id="18" name="obj187"/>
+          <p:cNvSpPr txBox="1"/>
+          <p:nvPr/>
+        </p:nvSpPr>
+        <p:spPr>
+          <a:xfrm>
+            <a:off x="6035040" y="1600200"/>
+            <a:ext cx="402336" cy="402336"/>
+          </a:xfrm>
+          <a:prstGeom prst="rect">
+            <a:avLst/>
+          </a:prstGeom>
+          <a:noFill/>
+          <a:ln/>
+        </p:spPr>
+        <p:txBody>
+          <a:bodyPr wrap="square" lIns="0" tIns="0" rIns="0" bIns="0" rtlCol="0" anchor="ctr"/>
+          <a:lstStyle/>
+          <a:p>
+            <a:pPr algn="ctr" indent="0" marL="0">
+              <a:buNone/>
+            </a:pPr>
+            <a:r>
+              <a:rPr lang="en-US" sz="1600" b="1" dirty="0">
+                <a:solidFill>
+                  <a:srgbClr val="FFFFFF"/>
+                </a:solidFill>
+                <a:latin typeface="Calibri" pitchFamily="34" charset="0"/>
+                <a:ea typeface="Calibri" pitchFamily="34" charset="-122"/>
+                <a:cs typeface="Calibri" pitchFamily="34" charset="-120"/>
+              </a:rPr>
+              <a:t>3</a:t>
+            </a:r>
+            <a:endParaRPr lang="en-US" sz="1600" dirty="0"/>
+          </a:p>
+        </p:txBody>
+      </p:sp>
+      <p:sp>
+        <p:nvSpPr>
+          <p:cNvPr id="19" name="obj188"/>
+          <p:cNvSpPr/>
+          <p:nvPr/>
+        </p:nvSpPr>
+        <p:spPr>
+          <a:xfrm>
+            <a:off x="6720840" y="1371600"/>
+            <a:ext cx="1874520" cy="914400"/>
+          </a:xfrm>
+          <a:prstGeom prst="roundRect">
+            <a:avLst>
+              <a:gd name="adj" fmla="val 14000"/>
+            </a:avLst>
+          </a:prstGeom>
+          <a:solidFill>
+            <a:srgbClr val="F4F4F2"/>
+          </a:solidFill>
+          <a:ln/>
+        </p:spPr>
+      </p:sp>
+      <p:sp>
+        <p:nvSpPr>
+          <p:cNvPr id="20" name="obj189"/>
+          <p:cNvSpPr txBox="1"/>
+          <p:nvPr/>
+        </p:nvSpPr>
+        <p:spPr>
+          <a:xfrm>
+            <a:off x="6858000" y="1463040"/>
+            <a:ext cx="1188720" cy="228600"/>
+          </a:xfrm>
+          <a:prstGeom prst="rect">
+            <a:avLst/>
+          </a:prstGeom>
+          <a:noFill/>
+          <a:ln/>
+        </p:spPr>
+        <p:txBody>
+          <a:bodyPr wrap="square" lIns="0" tIns="0" rIns="0" bIns="0" rtlCol="0" anchor="t"/>
+          <a:lstStyle/>
+          <a:p>
+            <a:pPr algn="l" indent="0" marL="0">
+              <a:buNone/>
+            </a:pPr>
+            <a:r>
+              <a:rPr lang="en-US" sz="1100" b="1" dirty="0">
+                <a:solidFill>
+                  <a:srgbClr val="F2643D"/>
+                </a:solidFill>
+                <a:latin typeface="Calibri" pitchFamily="34" charset="0"/>
+                <a:ea typeface="Calibri" pitchFamily="34" charset="-122"/>
+                <a:cs typeface="Calibri" pitchFamily="34" charset="-120"/>
+              </a:rPr>
+              <a:t>HU04</a:t>
+            </a:r>
+            <a:pPr algn="l" indent="0" marL="0">
+              <a:buNone/>
+            </a:pPr>
+            <a:r>
+              <a:rPr lang="en-US" sz="1100" dirty="0">
+                <a:solidFill>
+                  <a:srgbClr val="F2643D"/>
+                </a:solidFill>
+                <a:latin typeface="Calibri" pitchFamily="34" charset="0"/>
+                <a:ea typeface="Calibri" pitchFamily="34" charset="-122"/>
+                <a:cs typeface="Calibri" pitchFamily="34" charset="-120"/>
+              </a:rPr>
+              <a:t> · EP02</a:t>
+            </a:r>
+            <a:endParaRPr lang="en-US" sz="1100" dirty="0"/>
+          </a:p>
+        </p:txBody>
+      </p:sp>
+      <p:sp>
+        <p:nvSpPr>
+          <p:cNvPr id="21" name="obj190"/>
+          <p:cNvSpPr txBox="1"/>
+          <p:nvPr/>
+        </p:nvSpPr>
+        <p:spPr>
+          <a:xfrm>
+            <a:off x="6858000" y="1700784"/>
+            <a:ext cx="1207008" cy="530352"/>
+          </a:xfrm>
+          <a:prstGeom prst="rect">
+            <a:avLst/>
+          </a:prstGeom>
+          <a:noFill/>
+          <a:ln/>
+        </p:spPr>
+        <p:txBody>
+          <a:bodyPr wrap="square" lIns="0" tIns="0" rIns="0" bIns="0" rtlCol="0" anchor="t"/>
+          <a:lstStyle/>
+          <a:p>
+            <a:pPr algn="l" indent="0" marL="0">
+              <a:buNone/>
+            </a:pPr>
+            <a:r>
+              <a:rPr lang="en-US" sz="1100" dirty="0">
+                <a:solidFill>
+                  <a:srgbClr val="1F2421"/>
+                </a:solidFill>
+                <a:latin typeface="Calibri" pitchFamily="34" charset="0"/>
+                <a:ea typeface="Calibri" pitchFamily="34" charset="-122"/>
+                <a:cs typeface="Calibri" pitchFamily="34" charset="-120"/>
+              </a:rPr>
+              <a:t>Descartar frames sin trabajadores</a:t>
+            </a:r>
+            <a:endParaRPr lang="en-US" sz="1100" dirty="0"/>
+          </a:p>
+        </p:txBody>
+      </p:sp>
+      <p:sp>
+        <p:nvSpPr>
+          <p:cNvPr id="22" name="obj191"/>
+          <p:cNvSpPr/>
+          <p:nvPr/>
+        </p:nvSpPr>
+        <p:spPr>
+          <a:xfrm>
+            <a:off x="8092440" y="1600200"/>
+            <a:ext cx="402336" cy="402336"/>
+          </a:xfrm>
+          <a:prstGeom prst="roundRect">
+            <a:avLst>
+              <a:gd name="adj" fmla="val 50000"/>
+            </a:avLst>
+          </a:prstGeom>
+          <a:solidFill>
+            <a:srgbClr val="F2643D">
+              <a:alpha val="45000"/>
+            </a:srgbClr>
+          </a:solidFill>
+          <a:ln/>
+        </p:spPr>
+      </p:sp>
+      <p:sp>
+        <p:nvSpPr>
+          <p:cNvPr id="23" name="obj192"/>
+          <p:cNvSpPr txBox="1"/>
+          <p:nvPr/>
+        </p:nvSpPr>
+        <p:spPr>
+          <a:xfrm>
+            <a:off x="8092440" y="1600200"/>
+            <a:ext cx="402336" cy="402336"/>
+          </a:xfrm>
+          <a:prstGeom prst="rect">
+            <a:avLst/>
+          </a:prstGeom>
+          <a:noFill/>
+          <a:ln/>
+        </p:spPr>
+        <p:txBody>
+          <a:bodyPr wrap="square" lIns="0" tIns="0" rIns="0" bIns="0" rtlCol="0" anchor="ctr"/>
+          <a:lstStyle/>
+          <a:p>
+            <a:pPr algn="ctr" indent="0" marL="0">
+              <a:buNone/>
+            </a:pPr>
+            <a:r>
+              <a:rPr lang="en-US" sz="1600" b="1" dirty="0">
+                <a:solidFill>
+                  <a:srgbClr val="1F2421"/>
+                </a:solidFill>
+                <a:latin typeface="Calibri" pitchFamily="34" charset="0"/>
+                <a:ea typeface="Calibri" pitchFamily="34" charset="-122"/>
+                <a:cs typeface="Calibri" pitchFamily="34" charset="-120"/>
+              </a:rPr>
+              <a:t>2</a:t>
+            </a:r>
+            <a:endParaRPr lang="en-US" sz="1600" dirty="0"/>
+          </a:p>
+        </p:txBody>
+      </p:sp>
+      <p:sp>
+        <p:nvSpPr>
+          <p:cNvPr id="24" name="obj193"/>
+          <p:cNvSpPr/>
+          <p:nvPr/>
+        </p:nvSpPr>
+        <p:spPr>
+          <a:xfrm>
+            <a:off x="548640" y="2395728"/>
+            <a:ext cx="1874520" cy="914400"/>
+          </a:xfrm>
+          <a:prstGeom prst="roundRect">
+            <a:avLst>
+              <a:gd name="adj" fmla="val 14000"/>
+            </a:avLst>
+          </a:prstGeom>
+          <a:solidFill>
+            <a:srgbClr val="F4F4F2"/>
+          </a:solidFill>
+          <a:ln/>
+        </p:spPr>
+      </p:sp>
+      <p:sp>
+        <p:nvSpPr>
+          <p:cNvPr id="25" name="obj194"/>
+          <p:cNvSpPr txBox="1"/>
+          <p:nvPr/>
+        </p:nvSpPr>
+        <p:spPr>
+          <a:xfrm>
+            <a:off x="685800" y="2487168"/>
+            <a:ext cx="1188720" cy="228600"/>
+          </a:xfrm>
+          <a:prstGeom prst="rect">
+            <a:avLst/>
+          </a:prstGeom>
+          <a:noFill/>
+          <a:ln/>
+        </p:spPr>
+        <p:txBody>
+          <a:bodyPr wrap="square" lIns="0" tIns="0" rIns="0" bIns="0" rtlCol="0" anchor="t"/>
+          <a:lstStyle/>
+          <a:p>
+            <a:pPr algn="l" indent="0" marL="0">
+              <a:buNone/>
+            </a:pPr>
+            <a:r>
+              <a:rPr lang="en-US" sz="1100" b="1" dirty="0">
+                <a:solidFill>
+                  <a:srgbClr val="F2643D"/>
+                </a:solidFill>
+                <a:latin typeface="Calibri" pitchFamily="34" charset="0"/>
+                <a:ea typeface="Calibri" pitchFamily="34" charset="-122"/>
+                <a:cs typeface="Calibri" pitchFamily="34" charset="-120"/>
+              </a:rPr>
+              <a:t>HU05</a:t>
+            </a:r>
+            <a:pPr algn="l" indent="0" marL="0">
+              <a:buNone/>
+            </a:pPr>
+            <a:r>
+              <a:rPr lang="en-US" sz="1100" dirty="0">
+                <a:solidFill>
+                  <a:srgbClr val="F2643D"/>
+                </a:solidFill>
+                <a:latin typeface="Calibri" pitchFamily="34" charset="0"/>
+                <a:ea typeface="Calibri" pitchFamily="34" charset="-122"/>
+                <a:cs typeface="Calibri" pitchFamily="34" charset="-120"/>
+              </a:rPr>
+              <a:t> · EP03</a:t>
+            </a:r>
+            <a:endParaRPr lang="en-US" sz="1100" dirty="0"/>
+          </a:p>
+        </p:txBody>
+      </p:sp>
+      <p:sp>
+        <p:nvSpPr>
+          <p:cNvPr id="26" name="obj195"/>
+          <p:cNvSpPr txBox="1"/>
+          <p:nvPr/>
+        </p:nvSpPr>
+        <p:spPr>
+          <a:xfrm>
+            <a:off x="685800" y="2724912"/>
+            <a:ext cx="1207008" cy="530352"/>
+          </a:xfrm>
+          <a:prstGeom prst="rect">
+            <a:avLst/>
+          </a:prstGeom>
+          <a:noFill/>
+          <a:ln/>
+        </p:spPr>
+        <p:txBody>
+          <a:bodyPr wrap="square" lIns="0" tIns="0" rIns="0" bIns="0" rtlCol="0" anchor="t"/>
+          <a:lstStyle/>
+          <a:p>
+            <a:pPr algn="l" indent="0" marL="0">
+              <a:buNone/>
+            </a:pPr>
+            <a:r>
+              <a:rPr lang="en-US" sz="1100" dirty="0">
+                <a:solidFill>
+                  <a:srgbClr val="1F2421"/>
+                </a:solidFill>
+                <a:latin typeface="Calibri" pitchFamily="34" charset="0"/>
+                <a:ea typeface="Calibri" pitchFamily="34" charset="-122"/>
+                <a:cs typeface="Calibri" pitchFamily="34" charset="-120"/>
+              </a:rPr>
+              <a:t>Agrupar frames en clips</a:t>
+            </a:r>
+            <a:endParaRPr lang="en-US" sz="1100" dirty="0"/>
+          </a:p>
+        </p:txBody>
+      </p:sp>
+      <p:sp>
+        <p:nvSpPr>
+          <p:cNvPr id="27" name="obj196"/>
+          <p:cNvSpPr/>
+          <p:nvPr/>
+        </p:nvSpPr>
+        <p:spPr>
+          <a:xfrm>
+            <a:off x="1920240" y="2624328"/>
+            <a:ext cx="402336" cy="402336"/>
+          </a:xfrm>
+          <a:prstGeom prst="roundRect">
+            <a:avLst>
+              <a:gd name="adj" fmla="val 50000"/>
+            </a:avLst>
+          </a:prstGeom>
+          <a:solidFill>
+            <a:srgbClr val="F2643D">
+              <a:alpha val="45000"/>
+            </a:srgbClr>
+          </a:solidFill>
+          <a:ln/>
+        </p:spPr>
+      </p:sp>
+      <p:sp>
+        <p:nvSpPr>
+          <p:cNvPr id="28" name="obj197"/>
+          <p:cNvSpPr txBox="1"/>
+          <p:nvPr/>
+        </p:nvSpPr>
+        <p:spPr>
+          <a:xfrm>
+            <a:off x="1920240" y="2624328"/>
+            <a:ext cx="402336" cy="402336"/>
+          </a:xfrm>
+          <a:prstGeom prst="rect">
+            <a:avLst/>
+          </a:prstGeom>
+          <a:noFill/>
+          <a:ln/>
+        </p:spPr>
+        <p:txBody>
+          <a:bodyPr wrap="square" lIns="0" tIns="0" rIns="0" bIns="0" rtlCol="0" anchor="ctr"/>
+          <a:lstStyle/>
+          <a:p>
+            <a:pPr algn="ctr" indent="0" marL="0">
+              <a:buNone/>
+            </a:pPr>
+            <a:r>
+              <a:rPr lang="en-US" sz="1600" b="1" dirty="0">
+                <a:solidFill>
+                  <a:srgbClr val="1F2421"/>
+                </a:solidFill>
+                <a:latin typeface="Calibri" pitchFamily="34" charset="0"/>
+                <a:ea typeface="Calibri" pitchFamily="34" charset="-122"/>
+                <a:cs typeface="Calibri" pitchFamily="34" charset="-120"/>
+              </a:rPr>
+              <a:t>2</a:t>
+            </a:r>
+            <a:endParaRPr lang="en-US" sz="1600" dirty="0"/>
+          </a:p>
+        </p:txBody>
+      </p:sp>
+      <p:sp>
+        <p:nvSpPr>
+          <p:cNvPr id="29" name="obj198"/>
+          <p:cNvSpPr/>
+          <p:nvPr/>
+        </p:nvSpPr>
+        <p:spPr>
+          <a:xfrm>
+            <a:off x="2606040" y="2395728"/>
+            <a:ext cx="1874520" cy="914400"/>
+          </a:xfrm>
+          <a:prstGeom prst="roundRect">
+            <a:avLst>
+              <a:gd name="adj" fmla="val 14000"/>
+            </a:avLst>
+          </a:prstGeom>
+          <a:solidFill>
+            <a:srgbClr val="F4F4F2"/>
+          </a:solidFill>
+          <a:ln/>
+        </p:spPr>
+      </p:sp>
+      <p:sp>
+        <p:nvSpPr>
+          <p:cNvPr id="30" name="obj199"/>
+          <p:cNvSpPr txBox="1"/>
+          <p:nvPr/>
+        </p:nvSpPr>
+        <p:spPr>
+          <a:xfrm>
+            <a:off x="2743200" y="2487168"/>
+            <a:ext cx="1188720" cy="228600"/>
+          </a:xfrm>
+          <a:prstGeom prst="rect">
+            <a:avLst/>
+          </a:prstGeom>
+          <a:noFill/>
+          <a:ln/>
+        </p:spPr>
+        <p:txBody>
+          <a:bodyPr wrap="square" lIns="0" tIns="0" rIns="0" bIns="0" rtlCol="0" anchor="t"/>
+          <a:lstStyle/>
+          <a:p>
+            <a:pPr algn="l" indent="0" marL="0">
+              <a:buNone/>
+            </a:pPr>
+            <a:r>
+              <a:rPr lang="en-US" sz="1100" b="1" dirty="0">
+                <a:solidFill>
+                  <a:srgbClr val="F2643D"/>
+                </a:solidFill>
+                <a:latin typeface="Calibri" pitchFamily="34" charset="0"/>
+                <a:ea typeface="Calibri" pitchFamily="34" charset="-122"/>
+                <a:cs typeface="Calibri" pitchFamily="34" charset="-120"/>
+              </a:rPr>
+              <a:t>HU06</a:t>
+            </a:r>
+            <a:pPr algn="l" indent="0" marL="0">
+              <a:buNone/>
+            </a:pPr>
+            <a:r>
+              <a:rPr lang="en-US" sz="1100" dirty="0">
+                <a:solidFill>
+                  <a:srgbClr val="F2643D"/>
+                </a:solidFill>
+                <a:latin typeface="Calibri" pitchFamily="34" charset="0"/>
+                <a:ea typeface="Calibri" pitchFamily="34" charset="-122"/>
+                <a:cs typeface="Calibri" pitchFamily="34" charset="-120"/>
+              </a:rPr>
+              <a:t> · EP03</a:t>
+            </a:r>
+            <a:endParaRPr lang="en-US" sz="1100" dirty="0"/>
+          </a:p>
+        </p:txBody>
+      </p:sp>
+      <p:sp>
+        <p:nvSpPr>
+          <p:cNvPr id="31" name="obj200"/>
+          <p:cNvSpPr txBox="1"/>
+          <p:nvPr/>
+        </p:nvSpPr>
+        <p:spPr>
+          <a:xfrm>
+            <a:off x="2743200" y="2724912"/>
+            <a:ext cx="1207008" cy="530352"/>
+          </a:xfrm>
+          <a:prstGeom prst="rect">
+            <a:avLst/>
+          </a:prstGeom>
+          <a:noFill/>
+          <a:ln/>
+        </p:spPr>
+        <p:txBody>
+          <a:bodyPr wrap="square" lIns="0" tIns="0" rIns="0" bIns="0" rtlCol="0" anchor="t"/>
+          <a:lstStyle/>
+          <a:p>
+            <a:pPr algn="l" indent="0" marL="0">
+              <a:buNone/>
+            </a:pPr>
+            <a:r>
+              <a:rPr lang="en-US" sz="1100" dirty="0">
+                <a:solidFill>
+                  <a:srgbClr val="1F2421"/>
+                </a:solidFill>
+                <a:latin typeface="Calibri" pitchFamily="34" charset="0"/>
+                <a:ea typeface="Calibri" pitchFamily="34" charset="-122"/>
+                <a:cs typeface="Calibri" pitchFamily="34" charset="-120"/>
+              </a:rPr>
+              <a:t>Descartar clips muy cortos</a:t>
+            </a:r>
+            <a:endParaRPr lang="en-US" sz="1100" dirty="0"/>
+          </a:p>
+        </p:txBody>
+      </p:sp>
+      <p:sp>
+        <p:nvSpPr>
+          <p:cNvPr id="32" name="obj201"/>
+          <p:cNvSpPr/>
+          <p:nvPr/>
+        </p:nvSpPr>
+        <p:spPr>
+          <a:xfrm>
+            <a:off x="3977640" y="2624328"/>
+            <a:ext cx="402336" cy="402336"/>
+          </a:xfrm>
+          <a:prstGeom prst="roundRect">
+            <a:avLst>
+              <a:gd name="adj" fmla="val 50000"/>
+            </a:avLst>
+          </a:prstGeom>
+          <a:solidFill>
+            <a:srgbClr val="F2643D">
+              <a:alpha val="45000"/>
+            </a:srgbClr>
+          </a:solidFill>
+          <a:ln/>
+        </p:spPr>
+      </p:sp>
+      <p:sp>
+        <p:nvSpPr>
+          <p:cNvPr id="33" name="obj202"/>
+          <p:cNvSpPr txBox="1"/>
+          <p:nvPr/>
+        </p:nvSpPr>
+        <p:spPr>
+          <a:xfrm>
+            <a:off x="3977640" y="2624328"/>
+            <a:ext cx="402336" cy="402336"/>
+          </a:xfrm>
+          <a:prstGeom prst="rect">
+            <a:avLst/>
+          </a:prstGeom>
+          <a:noFill/>
+          <a:ln/>
+        </p:spPr>
+        <p:txBody>
+          <a:bodyPr wrap="square" lIns="0" tIns="0" rIns="0" bIns="0" rtlCol="0" anchor="ctr"/>
+          <a:lstStyle/>
+          <a:p>
+            <a:pPr algn="ctr" indent="0" marL="0">
+              <a:buNone/>
+            </a:pPr>
+            <a:r>
+              <a:rPr lang="en-US" sz="1600" b="1" dirty="0">
+                <a:solidFill>
+                  <a:srgbClr val="1F2421"/>
+                </a:solidFill>
+                <a:latin typeface="Calibri" pitchFamily="34" charset="0"/>
+                <a:ea typeface="Calibri" pitchFamily="34" charset="-122"/>
+                <a:cs typeface="Calibri" pitchFamily="34" charset="-120"/>
+              </a:rPr>
+              <a:t>2</a:t>
+            </a:r>
+            <a:endParaRPr lang="en-US" sz="1600" dirty="0"/>
+          </a:p>
+        </p:txBody>
+      </p:sp>
+      <p:sp>
+        <p:nvSpPr>
+          <p:cNvPr id="34" name="obj203"/>
+          <p:cNvSpPr/>
+          <p:nvPr/>
+        </p:nvSpPr>
+        <p:spPr>
+          <a:xfrm>
+            <a:off x="4663440" y="2395728"/>
+            <a:ext cx="1874520" cy="914400"/>
+          </a:xfrm>
+          <a:prstGeom prst="roundRect">
+            <a:avLst>
+              <a:gd name="adj" fmla="val 14000"/>
+            </a:avLst>
+          </a:prstGeom>
+          <a:solidFill>
+            <a:srgbClr val="F4F4F2"/>
+          </a:solidFill>
+          <a:ln/>
+        </p:spPr>
+      </p:sp>
+      <p:sp>
+        <p:nvSpPr>
+          <p:cNvPr id="35" name="obj204"/>
+          <p:cNvSpPr txBox="1"/>
+          <p:nvPr/>
+        </p:nvSpPr>
+        <p:spPr>
+          <a:xfrm>
+            <a:off x="4800600" y="2487168"/>
+            <a:ext cx="1188720" cy="228600"/>
+          </a:xfrm>
+          <a:prstGeom prst="rect">
+            <a:avLst/>
+          </a:prstGeom>
+          <a:noFill/>
+          <a:ln/>
+        </p:spPr>
+        <p:txBody>
+          <a:bodyPr wrap="square" lIns="0" tIns="0" rIns="0" bIns="0" rtlCol="0" anchor="t"/>
+          <a:lstStyle/>
+          <a:p>
+            <a:pPr algn="l" indent="0" marL="0">
+              <a:buNone/>
+            </a:pPr>
+            <a:r>
+              <a:rPr lang="en-US" sz="1100" b="1" dirty="0">
+                <a:solidFill>
+                  <a:srgbClr val="F2643D"/>
+                </a:solidFill>
+                <a:latin typeface="Calibri" pitchFamily="34" charset="0"/>
+                <a:ea typeface="Calibri" pitchFamily="34" charset="-122"/>
+                <a:cs typeface="Calibri" pitchFamily="34" charset="-120"/>
+              </a:rPr>
+              <a:t>HU07</a:t>
+            </a:r>
+            <a:pPr algn="l" indent="0" marL="0">
+              <a:buNone/>
+            </a:pPr>
+            <a:r>
+              <a:rPr lang="en-US" sz="1100" dirty="0">
+                <a:solidFill>
+                  <a:srgbClr val="F2643D"/>
+                </a:solidFill>
+                <a:latin typeface="Calibri" pitchFamily="34" charset="0"/>
+                <a:ea typeface="Calibri" pitchFamily="34" charset="-122"/>
+                <a:cs typeface="Calibri" pitchFamily="34" charset="-120"/>
+              </a:rPr>
+              <a:t> · EP04</a:t>
+            </a:r>
+            <a:endParaRPr lang="en-US" sz="1100" dirty="0"/>
+          </a:p>
+        </p:txBody>
+      </p:sp>
+      <p:sp>
+        <p:nvSpPr>
+          <p:cNvPr id="36" name="obj205"/>
+          <p:cNvSpPr txBox="1"/>
+          <p:nvPr/>
+        </p:nvSpPr>
+        <p:spPr>
+          <a:xfrm>
+            <a:off x="4800600" y="2724912"/>
+            <a:ext cx="1207008" cy="530352"/>
+          </a:xfrm>
+          <a:prstGeom prst="rect">
+            <a:avLst/>
+          </a:prstGeom>
+          <a:noFill/>
+          <a:ln/>
+        </p:spPr>
+        <p:txBody>
+          <a:bodyPr wrap="square" lIns="0" tIns="0" rIns="0" bIns="0" rtlCol="0" anchor="t"/>
+          <a:lstStyle/>
+          <a:p>
+            <a:pPr algn="l" indent="0" marL="0">
+              <a:buNone/>
+            </a:pPr>
+            <a:r>
+              <a:rPr lang="en-US" sz="1100" dirty="0">
+                <a:solidFill>
+                  <a:srgbClr val="1F2421"/>
+                </a:solidFill>
+                <a:latin typeface="Calibri" pitchFamily="34" charset="0"/>
+                <a:ea typeface="Calibri" pitchFamily="34" charset="-122"/>
+                <a:cs typeface="Calibri" pitchFamily="34" charset="-120"/>
+              </a:rPr>
+              <a:t>Procesar el clip con ConvLSTM</a:t>
+            </a:r>
+            <a:endParaRPr lang="en-US" sz="1100" dirty="0"/>
+          </a:p>
+        </p:txBody>
+      </p:sp>
+      <p:sp>
+        <p:nvSpPr>
+          <p:cNvPr id="37" name="obj206"/>
+          <p:cNvSpPr/>
+          <p:nvPr/>
+        </p:nvSpPr>
+        <p:spPr>
+          <a:xfrm>
+            <a:off x="6035040" y="2624328"/>
+            <a:ext cx="402336" cy="402336"/>
+          </a:xfrm>
+          <a:prstGeom prst="roundRect">
+            <a:avLst>
+              <a:gd name="adj" fmla="val 50000"/>
+            </a:avLst>
+          </a:prstGeom>
+          <a:solidFill>
+            <a:srgbClr val="F2643D">
+              <a:alpha val="85000"/>
+            </a:srgbClr>
+          </a:solidFill>
+          <a:ln/>
+        </p:spPr>
+      </p:sp>
+      <p:sp>
+        <p:nvSpPr>
+          <p:cNvPr id="38" name="obj207"/>
+          <p:cNvSpPr txBox="1"/>
+          <p:nvPr/>
+        </p:nvSpPr>
+        <p:spPr>
+          <a:xfrm>
+            <a:off x="6035040" y="2624328"/>
+            <a:ext cx="402336" cy="402336"/>
+          </a:xfrm>
+          <a:prstGeom prst="rect">
+            <a:avLst/>
+          </a:prstGeom>
+          <a:noFill/>
+          <a:ln/>
+        </p:spPr>
+        <p:txBody>
+          <a:bodyPr wrap="square" lIns="0" tIns="0" rIns="0" bIns="0" rtlCol="0" anchor="ctr"/>
+          <a:lstStyle/>
+          <a:p>
+            <a:pPr algn="ctr" indent="0" marL="0">
+              <a:buNone/>
+            </a:pPr>
+            <a:r>
+              <a:rPr lang="en-US" sz="1600" b="1" dirty="0">
+                <a:solidFill>
+                  <a:srgbClr val="FFFFFF"/>
+                </a:solidFill>
+                <a:latin typeface="Calibri" pitchFamily="34" charset="0"/>
+                <a:ea typeface="Calibri" pitchFamily="34" charset="-122"/>
+                <a:cs typeface="Calibri" pitchFamily="34" charset="-120"/>
+              </a:rPr>
+              <a:t>4</a:t>
+            </a:r>
+            <a:endParaRPr lang="en-US" sz="1600" dirty="0"/>
+          </a:p>
+        </p:txBody>
+      </p:sp>
+      <p:sp>
+        <p:nvSpPr>
+          <p:cNvPr id="39" name="obj208"/>
+          <p:cNvSpPr/>
+          <p:nvPr/>
+        </p:nvSpPr>
+        <p:spPr>
+          <a:xfrm>
+            <a:off x="6720840" y="2395728"/>
+            <a:ext cx="1874520" cy="914400"/>
+          </a:xfrm>
+          <a:prstGeom prst="roundRect">
+            <a:avLst>
+              <a:gd name="adj" fmla="val 14000"/>
+            </a:avLst>
+          </a:prstGeom>
+          <a:solidFill>
+            <a:srgbClr val="F4F4F2"/>
+          </a:solidFill>
+          <a:ln/>
+        </p:spPr>
+      </p:sp>
+      <p:sp>
+        <p:nvSpPr>
+          <p:cNvPr id="40" name="obj209"/>
+          <p:cNvSpPr txBox="1"/>
+          <p:nvPr/>
+        </p:nvSpPr>
+        <p:spPr>
+          <a:xfrm>
+            <a:off x="6858000" y="2487168"/>
+            <a:ext cx="1188720" cy="228600"/>
+          </a:xfrm>
+          <a:prstGeom prst="rect">
+            <a:avLst/>
+          </a:prstGeom>
+          <a:noFill/>
+          <a:ln/>
+        </p:spPr>
+        <p:txBody>
+          <a:bodyPr wrap="square" lIns="0" tIns="0" rIns="0" bIns="0" rtlCol="0" anchor="t"/>
+          <a:lstStyle/>
+          <a:p>
+            <a:pPr algn="l" indent="0" marL="0">
+              <a:buNone/>
+            </a:pPr>
+            <a:r>
+              <a:rPr lang="en-US" sz="1100" b="1" dirty="0">
+                <a:solidFill>
+                  <a:srgbClr val="F2643D"/>
+                </a:solidFill>
+                <a:latin typeface="Calibri" pitchFamily="34" charset="0"/>
+                <a:ea typeface="Calibri" pitchFamily="34" charset="-122"/>
+                <a:cs typeface="Calibri" pitchFamily="34" charset="-120"/>
+              </a:rPr>
+              <a:t>HU08</a:t>
+            </a:r>
+            <a:pPr algn="l" indent="0" marL="0">
+              <a:buNone/>
+            </a:pPr>
+            <a:r>
+              <a:rPr lang="en-US" sz="1100" dirty="0">
+                <a:solidFill>
+                  <a:srgbClr val="F2643D"/>
+                </a:solidFill>
+                <a:latin typeface="Calibri" pitchFamily="34" charset="0"/>
+                <a:ea typeface="Calibri" pitchFamily="34" charset="-122"/>
+                <a:cs typeface="Calibri" pitchFamily="34" charset="-120"/>
+              </a:rPr>
+              <a:t> · EP04</a:t>
+            </a:r>
+            <a:endParaRPr lang="en-US" sz="1100" dirty="0"/>
+          </a:p>
+        </p:txBody>
+      </p:sp>
+      <p:sp>
+        <p:nvSpPr>
+          <p:cNvPr id="41" name="obj210"/>
+          <p:cNvSpPr txBox="1"/>
+          <p:nvPr/>
+        </p:nvSpPr>
+        <p:spPr>
+          <a:xfrm>
+            <a:off x="6858000" y="2724912"/>
+            <a:ext cx="1207008" cy="530352"/>
+          </a:xfrm>
+          <a:prstGeom prst="rect">
+            <a:avLst/>
+          </a:prstGeom>
+          <a:noFill/>
+          <a:ln/>
+        </p:spPr>
+        <p:txBody>
+          <a:bodyPr wrap="square" lIns="0" tIns="0" rIns="0" bIns="0" rtlCol="0" anchor="t"/>
+          <a:lstStyle/>
+          <a:p>
+            <a:pPr algn="l" indent="0" marL="0">
+              <a:buNone/>
+            </a:pPr>
+            <a:r>
+              <a:rPr lang="en-US" sz="1100" dirty="0">
+                <a:solidFill>
+                  <a:srgbClr val="1F2421"/>
+                </a:solidFill>
+                <a:latin typeface="Calibri" pitchFamily="34" charset="0"/>
+                <a:ea typeface="Calibri" pitchFamily="34" charset="-122"/>
+                <a:cs typeface="Calibri" pitchFamily="34" charset="-120"/>
+              </a:rPr>
+              <a:t>Etiquetar: segura o insegura</a:t>
+            </a:r>
+            <a:endParaRPr lang="en-US" sz="1100" dirty="0"/>
+          </a:p>
+        </p:txBody>
+      </p:sp>
+      <p:sp>
+        <p:nvSpPr>
+          <p:cNvPr id="42" name="obj211"/>
+          <p:cNvSpPr/>
+          <p:nvPr/>
+        </p:nvSpPr>
+        <p:spPr>
+          <a:xfrm>
+            <a:off x="8092440" y="2624328"/>
+            <a:ext cx="402336" cy="402336"/>
+          </a:xfrm>
+          <a:prstGeom prst="roundRect">
+            <a:avLst>
+              <a:gd name="adj" fmla="val 50000"/>
+            </a:avLst>
+          </a:prstGeom>
+          <a:solidFill>
+            <a:srgbClr val="F2643D">
+              <a:alpha val="65000"/>
+            </a:srgbClr>
+          </a:solidFill>
+          <a:ln/>
+        </p:spPr>
+      </p:sp>
+      <p:sp>
+        <p:nvSpPr>
+          <p:cNvPr id="43" name="obj212"/>
+          <p:cNvSpPr txBox="1"/>
+          <p:nvPr/>
+        </p:nvSpPr>
+        <p:spPr>
+          <a:xfrm>
+            <a:off x="8092440" y="2624328"/>
+            <a:ext cx="402336" cy="402336"/>
+          </a:xfrm>
+          <a:prstGeom prst="rect">
+            <a:avLst/>
+          </a:prstGeom>
+          <a:noFill/>
+          <a:ln/>
+        </p:spPr>
+        <p:txBody>
+          <a:bodyPr wrap="square" lIns="0" tIns="0" rIns="0" bIns="0" rtlCol="0" anchor="ctr"/>
+          <a:lstStyle/>
+          <a:p>
+            <a:pPr algn="ctr" indent="0" marL="0">
+              <a:buNone/>
+            </a:pPr>
+            <a:r>
+              <a:rPr lang="en-US" sz="1600" b="1" dirty="0">
+                <a:solidFill>
+                  <a:srgbClr val="FFFFFF"/>
+                </a:solidFill>
+                <a:latin typeface="Calibri" pitchFamily="34" charset="0"/>
+                <a:ea typeface="Calibri" pitchFamily="34" charset="-122"/>
+                <a:cs typeface="Calibri" pitchFamily="34" charset="-120"/>
+              </a:rPr>
+              <a:t>3</a:t>
+            </a:r>
+            <a:endParaRPr lang="en-US" sz="1600" dirty="0"/>
+          </a:p>
+        </p:txBody>
+      </p:sp>
+      <p:sp>
+        <p:nvSpPr>
+          <p:cNvPr id="44" name="obj213"/>
+          <p:cNvSpPr/>
+          <p:nvPr/>
+        </p:nvSpPr>
+        <p:spPr>
+          <a:xfrm>
+            <a:off x="548640" y="3419856"/>
+            <a:ext cx="1874520" cy="914400"/>
+          </a:xfrm>
+          <a:prstGeom prst="roundRect">
+            <a:avLst>
+              <a:gd name="adj" fmla="val 14000"/>
+            </a:avLst>
+          </a:prstGeom>
+          <a:solidFill>
+            <a:srgbClr val="F4F4F2"/>
+          </a:solidFill>
+          <a:ln/>
+        </p:spPr>
+      </p:sp>
+      <p:sp>
+        <p:nvSpPr>
+          <p:cNvPr id="45" name="obj214"/>
+          <p:cNvSpPr txBox="1"/>
+          <p:nvPr/>
+        </p:nvSpPr>
+        <p:spPr>
+          <a:xfrm>
+            <a:off x="685800" y="3511296"/>
+            <a:ext cx="1188720" cy="228600"/>
+          </a:xfrm>
+          <a:prstGeom prst="rect">
+            <a:avLst/>
+          </a:prstGeom>
+          <a:noFill/>
+          <a:ln/>
+        </p:spPr>
+        <p:txBody>
+          <a:bodyPr wrap="square" lIns="0" tIns="0" rIns="0" bIns="0" rtlCol="0" anchor="t"/>
+          <a:lstStyle/>
+          <a:p>
+            <a:pPr algn="l" indent="0" marL="0">
+              <a:buNone/>
+            </a:pPr>
+            <a:r>
+              <a:rPr lang="en-US" sz="1100" b="1" dirty="0">
+                <a:solidFill>
+                  <a:srgbClr val="F2643D"/>
+                </a:solidFill>
+                <a:latin typeface="Calibri" pitchFamily="34" charset="0"/>
+                <a:ea typeface="Calibri" pitchFamily="34" charset="-122"/>
+                <a:cs typeface="Calibri" pitchFamily="34" charset="-120"/>
+              </a:rPr>
+              <a:t>HU09</a:t>
+            </a:r>
+            <a:pPr algn="l" indent="0" marL="0">
+              <a:buNone/>
+            </a:pPr>
+            <a:r>
+              <a:rPr lang="en-US" sz="1100" dirty="0">
+                <a:solidFill>
+                  <a:srgbClr val="F2643D"/>
+                </a:solidFill>
+                <a:latin typeface="Calibri" pitchFamily="34" charset="0"/>
+                <a:ea typeface="Calibri" pitchFamily="34" charset="-122"/>
+                <a:cs typeface="Calibri" pitchFamily="34" charset="-120"/>
+              </a:rPr>
+              <a:t> · EP05</a:t>
+            </a:r>
+            <a:endParaRPr lang="en-US" sz="1100" dirty="0"/>
+          </a:p>
+        </p:txBody>
+      </p:sp>
+      <p:sp>
+        <p:nvSpPr>
+          <p:cNvPr id="46" name="obj215"/>
+          <p:cNvSpPr txBox="1"/>
+          <p:nvPr/>
+        </p:nvSpPr>
+        <p:spPr>
+          <a:xfrm>
+            <a:off x="685800" y="3749040"/>
+            <a:ext cx="1207008" cy="530352"/>
+          </a:xfrm>
+          <a:prstGeom prst="rect">
+            <a:avLst/>
+          </a:prstGeom>
+          <a:noFill/>
+          <a:ln/>
+        </p:spPr>
+        <p:txBody>
+          <a:bodyPr wrap="square" lIns="0" tIns="0" rIns="0" bIns="0" rtlCol="0" anchor="t"/>
+          <a:lstStyle/>
+          <a:p>
+            <a:pPr algn="l" indent="0" marL="0">
+              <a:buNone/>
+            </a:pPr>
+            <a:r>
+              <a:rPr lang="en-US" sz="1100" dirty="0">
+                <a:solidFill>
+                  <a:srgbClr val="1F2421"/>
+                </a:solidFill>
+                <a:latin typeface="Calibri" pitchFamily="34" charset="0"/>
+                <a:ea typeface="Calibri" pitchFamily="34" charset="-122"/>
+                <a:cs typeface="Calibri" pitchFamily="34" charset="-120"/>
+              </a:rPr>
+              <a:t>Ver el video con recuadro de riesgo</a:t>
+            </a:r>
+            <a:endParaRPr lang="en-US" sz="1100" dirty="0"/>
+          </a:p>
+        </p:txBody>
+      </p:sp>
+      <p:sp>
+        <p:nvSpPr>
+          <p:cNvPr id="47" name="obj216"/>
+          <p:cNvSpPr/>
+          <p:nvPr/>
+        </p:nvSpPr>
+        <p:spPr>
+          <a:xfrm>
+            <a:off x="1920240" y="3648456"/>
+            <a:ext cx="402336" cy="402336"/>
+          </a:xfrm>
+          <a:prstGeom prst="roundRect">
+            <a:avLst>
+              <a:gd name="adj" fmla="val 50000"/>
+            </a:avLst>
+          </a:prstGeom>
+          <a:solidFill>
+            <a:srgbClr val="F2643D">
+              <a:alpha val="65000"/>
+            </a:srgbClr>
+          </a:solidFill>
+          <a:ln/>
+        </p:spPr>
+      </p:sp>
+      <p:sp>
+        <p:nvSpPr>
+          <p:cNvPr id="48" name="obj217"/>
+          <p:cNvSpPr txBox="1"/>
+          <p:nvPr/>
+        </p:nvSpPr>
+        <p:spPr>
+          <a:xfrm>
+            <a:off x="1920240" y="3648456"/>
+            <a:ext cx="402336" cy="402336"/>
+          </a:xfrm>
+          <a:prstGeom prst="rect">
+            <a:avLst/>
+          </a:prstGeom>
+          <a:noFill/>
+          <a:ln/>
+        </p:spPr>
+        <p:txBody>
+          <a:bodyPr wrap="square" lIns="0" tIns="0" rIns="0" bIns="0" rtlCol="0" anchor="ctr"/>
+          <a:lstStyle/>
+          <a:p>
+            <a:pPr algn="ctr" indent="0" marL="0">
+              <a:buNone/>
+            </a:pPr>
+            <a:r>
+              <a:rPr lang="en-US" sz="1600" b="1" dirty="0">
+                <a:solidFill>
+                  <a:srgbClr val="FFFFFF"/>
+                </a:solidFill>
+                <a:latin typeface="Calibri" pitchFamily="34" charset="0"/>
+                <a:ea typeface="Calibri" pitchFamily="34" charset="-122"/>
+                <a:cs typeface="Calibri" pitchFamily="34" charset="-120"/>
+              </a:rPr>
+              <a:t>3</a:t>
+            </a:r>
+            <a:endParaRPr lang="en-US" sz="1600" dirty="0"/>
+          </a:p>
+        </p:txBody>
+      </p:sp>
+      <p:sp>
+        <p:nvSpPr>
+          <p:cNvPr id="49" name="obj218"/>
+          <p:cNvSpPr/>
+          <p:nvPr/>
+        </p:nvSpPr>
+        <p:spPr>
+          <a:xfrm>
+            <a:off x="2606040" y="3419856"/>
+            <a:ext cx="1874520" cy="914400"/>
+          </a:xfrm>
+          <a:prstGeom prst="roundRect">
+            <a:avLst>
+              <a:gd name="adj" fmla="val 14000"/>
+            </a:avLst>
+          </a:prstGeom>
+          <a:solidFill>
+            <a:srgbClr val="F4F4F2"/>
+          </a:solidFill>
+          <a:ln/>
+        </p:spPr>
+      </p:sp>
+      <p:sp>
+        <p:nvSpPr>
+          <p:cNvPr id="50" name="obj219"/>
+          <p:cNvSpPr txBox="1"/>
+          <p:nvPr/>
+        </p:nvSpPr>
+        <p:spPr>
+          <a:xfrm>
+            <a:off x="2743200" y="3511296"/>
+            <a:ext cx="1188720" cy="228600"/>
+          </a:xfrm>
+          <a:prstGeom prst="rect">
+            <a:avLst/>
+          </a:prstGeom>
+          <a:noFill/>
+          <a:ln/>
+        </p:spPr>
+        <p:txBody>
+          <a:bodyPr wrap="square" lIns="0" tIns="0" rIns="0" bIns="0" rtlCol="0" anchor="t"/>
+          <a:lstStyle/>
+          <a:p>
+            <a:pPr algn="l" indent="0" marL="0">
+              <a:buNone/>
+            </a:pPr>
+            <a:r>
+              <a:rPr lang="en-US" sz="1100" b="1" dirty="0">
+                <a:solidFill>
+                  <a:srgbClr val="F2643D"/>
+                </a:solidFill>
+                <a:latin typeface="Calibri" pitchFamily="34" charset="0"/>
+                <a:ea typeface="Calibri" pitchFamily="34" charset="-122"/>
+                <a:cs typeface="Calibri" pitchFamily="34" charset="-120"/>
+              </a:rPr>
+              <a:t>HU10</a:t>
+            </a:r>
+            <a:pPr algn="l" indent="0" marL="0">
+              <a:buNone/>
+            </a:pPr>
+            <a:r>
+              <a:rPr lang="en-US" sz="1100" dirty="0">
+                <a:solidFill>
+                  <a:srgbClr val="F2643D"/>
+                </a:solidFill>
+                <a:latin typeface="Calibri" pitchFamily="34" charset="0"/>
+                <a:ea typeface="Calibri" pitchFamily="34" charset="-122"/>
+                <a:cs typeface="Calibri" pitchFamily="34" charset="-120"/>
+              </a:rPr>
+              <a:t> · EP05</a:t>
+            </a:r>
+            <a:endParaRPr lang="en-US" sz="1100" dirty="0"/>
+          </a:p>
+        </p:txBody>
+      </p:sp>
+      <p:sp>
+        <p:nvSpPr>
+          <p:cNvPr id="51" name="obj220"/>
+          <p:cNvSpPr txBox="1"/>
+          <p:nvPr/>
+        </p:nvSpPr>
+        <p:spPr>
+          <a:xfrm>
+            <a:off x="2743200" y="3749040"/>
+            <a:ext cx="1207008" cy="530352"/>
+          </a:xfrm>
+          <a:prstGeom prst="rect">
+            <a:avLst/>
+          </a:prstGeom>
+          <a:noFill/>
+          <a:ln/>
+        </p:spPr>
+        <p:txBody>
+          <a:bodyPr wrap="square" lIns="0" tIns="0" rIns="0" bIns="0" rtlCol="0" anchor="t"/>
+          <a:lstStyle/>
+          <a:p>
+            <a:pPr algn="l" indent="0" marL="0">
+              <a:buNone/>
+            </a:pPr>
+            <a:r>
+              <a:rPr lang="en-US" sz="1100" dirty="0">
+                <a:solidFill>
+                  <a:srgbClr val="1F2421"/>
+                </a:solidFill>
+                <a:latin typeface="Calibri" pitchFamily="34" charset="0"/>
+                <a:ea typeface="Calibri" pitchFamily="34" charset="-122"/>
+                <a:cs typeface="Calibri" pitchFamily="34" charset="-120"/>
+              </a:rPr>
+              <a:t>Activar la alerta</a:t>
+            </a:r>
+            <a:endParaRPr lang="en-US" sz="1100" dirty="0"/>
+          </a:p>
+        </p:txBody>
+      </p:sp>
+      <p:sp>
+        <p:nvSpPr>
+          <p:cNvPr id="52" name="obj221"/>
+          <p:cNvSpPr/>
+          <p:nvPr/>
+        </p:nvSpPr>
+        <p:spPr>
+          <a:xfrm>
+            <a:off x="3977640" y="3648456"/>
+            <a:ext cx="402336" cy="402336"/>
+          </a:xfrm>
+          <a:prstGeom prst="roundRect">
+            <a:avLst>
+              <a:gd name="adj" fmla="val 50000"/>
+            </a:avLst>
+          </a:prstGeom>
+          <a:solidFill>
+            <a:srgbClr val="F2643D">
+              <a:alpha val="45000"/>
+            </a:srgbClr>
+          </a:solidFill>
+          <a:ln/>
+        </p:spPr>
+      </p:sp>
+      <p:sp>
+        <p:nvSpPr>
+          <p:cNvPr id="53" name="obj222"/>
+          <p:cNvSpPr txBox="1"/>
+          <p:nvPr/>
+        </p:nvSpPr>
+        <p:spPr>
+          <a:xfrm>
+            <a:off x="3977640" y="3648456"/>
+            <a:ext cx="402336" cy="402336"/>
+          </a:xfrm>
+          <a:prstGeom prst="rect">
+            <a:avLst/>
+          </a:prstGeom>
+          <a:noFill/>
+          <a:ln/>
+        </p:spPr>
+        <p:txBody>
+          <a:bodyPr wrap="square" lIns="0" tIns="0" rIns="0" bIns="0" rtlCol="0" anchor="ctr"/>
+          <a:lstStyle/>
+          <a:p>
+            <a:pPr algn="ctr" indent="0" marL="0">
+              <a:buNone/>
+            </a:pPr>
+            <a:r>
+              <a:rPr lang="en-US" sz="1600" b="1" dirty="0">
+                <a:solidFill>
+                  <a:srgbClr val="1F2421"/>
+                </a:solidFill>
+                <a:latin typeface="Calibri" pitchFamily="34" charset="0"/>
+                <a:ea typeface="Calibri" pitchFamily="34" charset="-122"/>
+                <a:cs typeface="Calibri" pitchFamily="34" charset="-120"/>
+              </a:rPr>
+              <a:t>2</a:t>
+            </a:r>
+            <a:endParaRPr lang="en-US" sz="1600" dirty="0"/>
+          </a:p>
+        </p:txBody>
+      </p:sp>
+      <p:sp>
+        <p:nvSpPr>
+          <p:cNvPr id="54" name="obj223"/>
+          <p:cNvSpPr/>
+          <p:nvPr/>
+        </p:nvSpPr>
+        <p:spPr>
+          <a:xfrm>
+            <a:off x="4663440" y="3419856"/>
+            <a:ext cx="1874520" cy="914400"/>
+          </a:xfrm>
+          <a:prstGeom prst="roundRect">
+            <a:avLst>
+              <a:gd name="adj" fmla="val 14000"/>
+            </a:avLst>
+          </a:prstGeom>
+          <a:solidFill>
+            <a:srgbClr val="F4F4F2"/>
+          </a:solidFill>
+          <a:ln/>
+        </p:spPr>
+      </p:sp>
+      <p:sp>
+        <p:nvSpPr>
+          <p:cNvPr id="55" name="obj224"/>
+          <p:cNvSpPr txBox="1"/>
+          <p:nvPr/>
+        </p:nvSpPr>
+        <p:spPr>
+          <a:xfrm>
+            <a:off x="4800600" y="3511296"/>
+            <a:ext cx="1188720" cy="228600"/>
+          </a:xfrm>
+          <a:prstGeom prst="rect">
+            <a:avLst/>
+          </a:prstGeom>
+          <a:noFill/>
+          <a:ln/>
+        </p:spPr>
+        <p:txBody>
+          <a:bodyPr wrap="square" lIns="0" tIns="0" rIns="0" bIns="0" rtlCol="0" anchor="t"/>
+          <a:lstStyle/>
+          <a:p>
+            <a:pPr algn="l" indent="0" marL="0">
+              <a:buNone/>
+            </a:pPr>
+            <a:r>
+              <a:rPr lang="en-US" sz="1100" b="1" dirty="0">
+                <a:solidFill>
+                  <a:srgbClr val="F2643D"/>
+                </a:solidFill>
+                <a:latin typeface="Calibri" pitchFamily="34" charset="0"/>
+                <a:ea typeface="Calibri" pitchFamily="34" charset="-122"/>
+                <a:cs typeface="Calibri" pitchFamily="34" charset="-120"/>
+              </a:rPr>
+              <a:t>HU11</a:t>
+            </a:r>
+            <a:pPr algn="l" indent="0" marL="0">
+              <a:buNone/>
+            </a:pPr>
+            <a:r>
+              <a:rPr lang="en-US" sz="1100" dirty="0">
+                <a:solidFill>
+                  <a:srgbClr val="F2643D"/>
+                </a:solidFill>
+                <a:latin typeface="Calibri" pitchFamily="34" charset="0"/>
+                <a:ea typeface="Calibri" pitchFamily="34" charset="-122"/>
+                <a:cs typeface="Calibri" pitchFamily="34" charset="-120"/>
+              </a:rPr>
+              <a:t> · EP06</a:t>
+            </a:r>
+            <a:endParaRPr lang="en-US" sz="1100" dirty="0"/>
+          </a:p>
+        </p:txBody>
+      </p:sp>
+      <p:sp>
+        <p:nvSpPr>
+          <p:cNvPr id="56" name="obj225"/>
+          <p:cNvSpPr txBox="1"/>
+          <p:nvPr/>
+        </p:nvSpPr>
+        <p:spPr>
+          <a:xfrm>
+            <a:off x="4800600" y="3749040"/>
+            <a:ext cx="1207008" cy="530352"/>
+          </a:xfrm>
+          <a:prstGeom prst="rect">
+            <a:avLst/>
+          </a:prstGeom>
+          <a:noFill/>
+          <a:ln/>
+        </p:spPr>
+        <p:txBody>
+          <a:bodyPr wrap="square" lIns="0" tIns="0" rIns="0" bIns="0" rtlCol="0" anchor="t"/>
+          <a:lstStyle/>
+          <a:p>
+            <a:pPr algn="l" indent="0" marL="0">
+              <a:buNone/>
+            </a:pPr>
+            <a:r>
+              <a:rPr lang="en-US" sz="1100" dirty="0">
+                <a:solidFill>
+                  <a:srgbClr val="1F2421"/>
+                </a:solidFill>
+                <a:latin typeface="Calibri" pitchFamily="34" charset="0"/>
+                <a:ea typeface="Calibri" pitchFamily="34" charset="-122"/>
+                <a:cs typeface="Calibri" pitchFamily="34" charset="-120"/>
+              </a:rPr>
+              <a:t>Ajustar el umbral de YOLOv4</a:t>
+            </a:r>
+            <a:endParaRPr lang="en-US" sz="1100" dirty="0"/>
+          </a:p>
+        </p:txBody>
+      </p:sp>
+      <p:sp>
+        <p:nvSpPr>
+          <p:cNvPr id="57" name="obj226"/>
+          <p:cNvSpPr/>
+          <p:nvPr/>
+        </p:nvSpPr>
+        <p:spPr>
+          <a:xfrm>
+            <a:off x="6035040" y="3648456"/>
+            <a:ext cx="402336" cy="402336"/>
+          </a:xfrm>
+          <a:prstGeom prst="roundRect">
+            <a:avLst>
+              <a:gd name="adj" fmla="val 50000"/>
+            </a:avLst>
+          </a:prstGeom>
+          <a:solidFill>
+            <a:srgbClr val="F2643D">
+              <a:alpha val="28000"/>
+            </a:srgbClr>
+          </a:solidFill>
+          <a:ln/>
+        </p:spPr>
+      </p:sp>
+      <p:sp>
+        <p:nvSpPr>
+          <p:cNvPr id="58" name="obj227"/>
+          <p:cNvSpPr txBox="1"/>
+          <p:nvPr/>
+        </p:nvSpPr>
+        <p:spPr>
+          <a:xfrm>
+            <a:off x="6035040" y="3648456"/>
+            <a:ext cx="402336" cy="402336"/>
+          </a:xfrm>
+          <a:prstGeom prst="rect">
+            <a:avLst/>
+          </a:prstGeom>
+          <a:noFill/>
+          <a:ln/>
+        </p:spPr>
+        <p:txBody>
+          <a:bodyPr wrap="square" lIns="0" tIns="0" rIns="0" bIns="0" rtlCol="0" anchor="ctr"/>
+          <a:lstStyle/>
+          <a:p>
+            <a:pPr algn="ctr" indent="0" marL="0">
+              <a:buNone/>
+            </a:pPr>
+            <a:r>
+              <a:rPr lang="en-US" sz="1600" b="1" dirty="0">
+                <a:solidFill>
+                  <a:srgbClr val="1F2421"/>
+                </a:solidFill>
+                <a:latin typeface="Calibri" pitchFamily="34" charset="0"/>
+                <a:ea typeface="Calibri" pitchFamily="34" charset="-122"/>
+                <a:cs typeface="Calibri" pitchFamily="34" charset="-120"/>
+              </a:rPr>
+              <a:t>1</a:t>
+            </a:r>
+            <a:endParaRPr lang="en-US" sz="1600" dirty="0"/>
+          </a:p>
+        </p:txBody>
+      </p:sp>
+      <p:sp>
+        <p:nvSpPr>
+          <p:cNvPr id="59" name="obj228"/>
+          <p:cNvSpPr/>
+          <p:nvPr/>
+        </p:nvSpPr>
+        <p:spPr>
+          <a:xfrm>
+            <a:off x="6720840" y="3419856"/>
+            <a:ext cx="1874520" cy="914400"/>
+          </a:xfrm>
+          <a:prstGeom prst="roundRect">
+            <a:avLst>
+              <a:gd name="adj" fmla="val 14000"/>
+            </a:avLst>
+          </a:prstGeom>
+          <a:solidFill>
+            <a:srgbClr val="F4F4F2"/>
+          </a:solidFill>
+          <a:ln/>
+        </p:spPr>
+      </p:sp>
+      <p:sp>
+        <p:nvSpPr>
+          <p:cNvPr id="60" name="obj229"/>
+          <p:cNvSpPr txBox="1"/>
+          <p:nvPr/>
+        </p:nvSpPr>
+        <p:spPr>
+          <a:xfrm>
+            <a:off x="6858000" y="3511296"/>
+            <a:ext cx="1188720" cy="228600"/>
+          </a:xfrm>
+          <a:prstGeom prst="rect">
+            <a:avLst/>
+          </a:prstGeom>
+          <a:noFill/>
+          <a:ln/>
+        </p:spPr>
+        <p:txBody>
+          <a:bodyPr wrap="square" lIns="0" tIns="0" rIns="0" bIns="0" rtlCol="0" anchor="t"/>
+          <a:lstStyle/>
+          <a:p>
+            <a:pPr algn="l" indent="0" marL="0">
+              <a:buNone/>
+            </a:pPr>
+            <a:r>
+              <a:rPr lang="en-US" sz="1100" b="1" dirty="0">
+                <a:solidFill>
+                  <a:srgbClr val="F2643D"/>
+                </a:solidFill>
+                <a:latin typeface="Calibri" pitchFamily="34" charset="0"/>
+                <a:ea typeface="Calibri" pitchFamily="34" charset="-122"/>
+                <a:cs typeface="Calibri" pitchFamily="34" charset="-120"/>
+              </a:rPr>
+              <a:t>HU12</a:t>
+            </a:r>
+            <a:pPr algn="l" indent="0" marL="0">
+              <a:buNone/>
+            </a:pPr>
+            <a:r>
+              <a:rPr lang="en-US" sz="1100" dirty="0">
+                <a:solidFill>
+                  <a:srgbClr val="F2643D"/>
+                </a:solidFill>
+                <a:latin typeface="Calibri" pitchFamily="34" charset="0"/>
+                <a:ea typeface="Calibri" pitchFamily="34" charset="-122"/>
+                <a:cs typeface="Calibri" pitchFamily="34" charset="-120"/>
+              </a:rPr>
+              <a:t> · EP06</a:t>
+            </a:r>
+            <a:endParaRPr lang="en-US" sz="1100" dirty="0"/>
+          </a:p>
+        </p:txBody>
+      </p:sp>
+      <p:sp>
+        <p:nvSpPr>
+          <p:cNvPr id="61" name="obj230"/>
+          <p:cNvSpPr txBox="1"/>
+          <p:nvPr/>
+        </p:nvSpPr>
+        <p:spPr>
+          <a:xfrm>
+            <a:off x="6858000" y="3749040"/>
+            <a:ext cx="1207008" cy="530352"/>
+          </a:xfrm>
+          <a:prstGeom prst="rect">
+            <a:avLst/>
+          </a:prstGeom>
+          <a:noFill/>
+          <a:ln/>
+        </p:spPr>
+        <p:txBody>
+          <a:bodyPr wrap="square" lIns="0" tIns="0" rIns="0" bIns="0" rtlCol="0" anchor="t"/>
+          <a:lstStyle/>
+          <a:p>
+            <a:pPr algn="l" indent="0" marL="0">
+              <a:buNone/>
+            </a:pPr>
+            <a:r>
+              <a:rPr lang="en-US" sz="1100" dirty="0">
+                <a:solidFill>
+                  <a:srgbClr val="1F2421"/>
+                </a:solidFill>
+                <a:latin typeface="Calibri" pitchFamily="34" charset="0"/>
+                <a:ea typeface="Calibri" pitchFamily="34" charset="-122"/>
+                <a:cs typeface="Calibri" pitchFamily="34" charset="-120"/>
+              </a:rPr>
+              <a:t>Ver el log de tiempos</a:t>
+            </a:r>
+            <a:endParaRPr lang="en-US" sz="1100" dirty="0"/>
+          </a:p>
+        </p:txBody>
+      </p:sp>
+      <p:sp>
+        <p:nvSpPr>
+          <p:cNvPr id="62" name="obj231"/>
+          <p:cNvSpPr/>
+          <p:nvPr/>
+        </p:nvSpPr>
+        <p:spPr>
+          <a:xfrm>
+            <a:off x="8092440" y="3648456"/>
+            <a:ext cx="402336" cy="402336"/>
+          </a:xfrm>
+          <a:prstGeom prst="roundRect">
+            <a:avLst>
+              <a:gd name="adj" fmla="val 50000"/>
+            </a:avLst>
+          </a:prstGeom>
+          <a:solidFill>
+            <a:srgbClr val="F2643D">
+              <a:alpha val="45000"/>
+            </a:srgbClr>
+          </a:solidFill>
+          <a:ln/>
+        </p:spPr>
+      </p:sp>
+      <p:sp>
+        <p:nvSpPr>
+          <p:cNvPr id="63" name="obj232"/>
+          <p:cNvSpPr txBox="1"/>
+          <p:nvPr/>
+        </p:nvSpPr>
+        <p:spPr>
+          <a:xfrm>
+            <a:off x="8092440" y="3648456"/>
+            <a:ext cx="402336" cy="402336"/>
+          </a:xfrm>
+          <a:prstGeom prst="rect">
+            <a:avLst/>
+          </a:prstGeom>
+          <a:noFill/>
+          <a:ln/>
+        </p:spPr>
+        <p:txBody>
+          <a:bodyPr wrap="square" lIns="0" tIns="0" rIns="0" bIns="0" rtlCol="0" anchor="ctr"/>
+          <a:lstStyle/>
+          <a:p>
+            <a:pPr algn="ctr" indent="0" marL="0">
+              <a:buNone/>
+            </a:pPr>
+            <a:r>
+              <a:rPr lang="en-US" sz="1600" b="1" dirty="0">
+                <a:solidFill>
+                  <a:srgbClr val="1F2421"/>
+                </a:solidFill>
+                <a:latin typeface="Calibri" pitchFamily="34" charset="0"/>
+                <a:ea typeface="Calibri" pitchFamily="34" charset="-122"/>
+                <a:cs typeface="Calibri" pitchFamily="34" charset="-120"/>
+              </a:rPr>
+              <a:t>2</a:t>
+            </a:r>
+            <a:endParaRPr lang="en-US" sz="1600" dirty="0"/>
+          </a:p>
+        </p:txBody>
+      </p:sp>
+      <p:sp>
+        <p:nvSpPr>
+          <p:cNvPr id="64" name="obj233"/>
+          <p:cNvSpPr txBox="1"/>
+          <p:nvPr/>
+        </p:nvSpPr>
+        <p:spPr>
+          <a:xfrm>
+            <a:off x="548640" y="4462272"/>
+            <a:ext cx="8046720" cy="256032"/>
+          </a:xfrm>
+          <a:prstGeom prst="rect">
+            <a:avLst/>
+          </a:prstGeom>
+          <a:noFill/>
+          <a:ln/>
+        </p:spPr>
+        <p:txBody>
+          <a:bodyPr wrap="square" lIns="0" tIns="0" rIns="0" bIns="0" rtlCol="0" anchor="t"/>
+          <a:lstStyle/>
+          <a:p>
+            <a:pPr algn="l" indent="0" marL="0">
+              <a:buNone/>
+            </a:pPr>
+            <a:r>
+              <a:rPr lang="en-US" sz="1100" b="1" dirty="0">
+                <a:solidFill>
+                  <a:srgbClr val="6B7280"/>
+                </a:solidFill>
+                <a:latin typeface="Calibri" pitchFamily="34" charset="0"/>
+                <a:ea typeface="Calibri" pitchFamily="34" charset="-122"/>
+                <a:cs typeface="Calibri" pitchFamily="34" charset="-120"/>
+              </a:rPr>
+              <a:t>Lectura: </a:t>
+            </a:r>
+            <a:pPr algn="l" indent="0" marL="0">
+              <a:buNone/>
+            </a:pPr>
+            <a:r>
+              <a:rPr lang="en-US" sz="1100" dirty="0">
+                <a:solidFill>
+                  <a:srgbClr val="6B7280"/>
+                </a:solidFill>
+                <a:latin typeface="Calibri" pitchFamily="34" charset="0"/>
+                <a:ea typeface="Calibri" pitchFamily="34" charset="-122"/>
+                <a:cs typeface="Calibri" pitchFamily="34" charset="-120"/>
+              </a:rPr>
+              <a:t>la EP04 (ConvLSTM) concentra el mayor esfuerzo; las historias de carga y configuración son pequeñas. Votos simulados.</a:t>
+            </a:r>
+            <a:endParaRPr lang="en-US" sz="1100" dirty="0"/>
+          </a:p>
+        </p:txBody>
+      </p:sp>
+      <p:sp>
+        <p:nvSpPr>
+          <p:cNvPr id="25" name="Slide Number Placeholder 0"/>
+          <p:cNvSpPr>
+            <a:spLocks noGrp="1"/>
+          </p:cNvSpPr>
+          <p:nvPr>
+            <p:ph type="sldNum" sz="quarter" idx="4294967295"/>
+          </p:nvPr>
+        </p:nvSpPr>
+        <p:spPr>
+          <a:xfrm>
+            <a:off x="8138160" y="4754880"/>
+            <a:ext cx="457200" cy="228600"/>
+          </a:xfrm>
+          <a:prstGeom prst="rect">
+            <a:avLst/>
+          </a:prstGeom>
+          <a:extLst>
+            <a:ext uri="{C572A759-6A51-4108-AA02-DFA0A04FC94B}">
+              <ma14:wrappingTextBoxFlag xmlns:ma14="http://schemas.microsoft.com/office/mac/drawingml/2011/main" val="0"/>
+            </a:ext>
+          </a:extLst>
+        </p:spPr>
+        <p:txBody>
+          <a:bodyPr/>
+          <a:lstStyle>
+            <a:lvl1pPr>
+              <a:defRPr sz="900">
+                <a:solidFill>
+                  <a:srgbClr val="6B7280"/>
+                </a:solidFill>
+                <a:latin typeface="Calibri"/>
+                <a:ea typeface="Calibri"/>
+                <a:cs typeface="Calibri"/>
+              </a:defRPr>
+            </a:lvl1pPr>
+          </a:lstStyle>
+          <a:p>
+            <a:pPr algn="r"/>
+            <a:fld id="{F7021451-1387-4CA6-816F-3879F97B5CBC}" type="slidenum">
+              <a:rPr b="0" lang="en-US"/>
+              <a:t>6</a:t>
+            </a:fld>
+            <a:endParaRPr lang="en-US"/>
+          </a:p>
+        </p:txBody>
+      </p:sp>
+    </p:spTree>
+  </p:cSld>
+  <p:clrMapOvr>
+    <a:masterClrMapping/>
+  </p:clrMapOvr>
+</p:sld>
+</file>
+
+<file path=ppt/slides/slide7.xml><?xml version="1.0" encoding="utf-8"?>
+<p:sld xmlns:a="http://schemas.openxmlformats.org/drawingml/2006/main" xmlns:r="http://schemas.openxmlformats.org/officeDocument/2006/relationships" xmlns:p="http://schemas.openxmlformats.org/presentationml/2006/main">
+  <p:cSld name="Slide 7">
+    <p:spTree>
+      <p:nvGrpSpPr>
+        <p:cNvPr id="1" name=""/>
+        <p:cNvGrpSpPr/>
+        <p:nvPr/>
+      </p:nvGrpSpPr>
+      <p:grpSpPr>
+        <a:xfrm>
+          <a:off x="0" y="0"/>
+          <a:ext cx="0" cy="0"/>
+          <a:chOff x="0" y="0"/>
+          <a:chExt cx="0" cy="0"/>
+        </a:xfrm>
+      </p:grpSpPr>
+      <p:sp>
+        <p:nvSpPr>
+          <p:cNvPr id="2" name="Text 0"/>
+          <p:cNvSpPr/>
+          <p:nvPr>
+            <p:ph idx="100" type="title" hasCustomPrompt="1"/>
+          </p:nvPr>
+        </p:nvSpPr>
+        <p:spPr>
+          <a:xfrm>
+            <a:off x="548640" y="365760"/>
+            <a:ext cx="8046720" cy="640080"/>
+          </a:xfrm>
+          <a:prstGeom prst="rect">
+            <a:avLst/>
+          </a:prstGeom>
+          <a:noFill/>
+          <a:ln/>
+        </p:spPr>
+        <p:txBody>
+          <a:bodyPr wrap="square" lIns="0" tIns="0" rIns="0" bIns="0" rtlCol="0" anchor="ctr"/>
+          <a:lstStyle/>
+          <a:p>
+            <a:pPr algn="l" indent="0" marL="0">
+              <a:buNone/>
+            </a:pPr>
+            <a:r>
+              <a:rPr lang="en-US" sz="3000" b="1" dirty="0">
+                <a:solidFill>
+                  <a:srgbClr val="1F2421"/>
+                </a:solidFill>
+                <a:latin typeface="Calibri" pitchFamily="34" charset="0"/>
+                <a:ea typeface="Calibri" pitchFamily="34" charset="-122"/>
+                <a:cs typeface="Calibri" pitchFamily="34" charset="-120"/>
+              </a:rPr>
+              <a:t>Decidimos en equipo qué entra a cada sprint</a:t>
+            </a:r>
+            <a:endParaRPr lang="en-US" sz="3000" dirty="0"/>
+          </a:p>
+        </p:txBody>
+      </p:sp>
+      <p:sp>
+        <p:nvSpPr>
+          <p:cNvPr id="3" name="obj234"/>
+          <p:cNvSpPr txBox="1"/>
+          <p:nvPr/>
+        </p:nvSpPr>
+        <p:spPr>
+          <a:xfrm>
+            <a:off x="548640" y="1024128"/>
+            <a:ext cx="8046720" cy="274320"/>
+          </a:xfrm>
+          <a:prstGeom prst="rect">
+            <a:avLst/>
+          </a:prstGeom>
+          <a:noFill/>
+          <a:ln/>
+        </p:spPr>
+        <p:txBody>
+          <a:bodyPr wrap="square" lIns="0" tIns="0" rIns="0" bIns="0" rtlCol="0" anchor="t"/>
+          <a:lstStyle/>
+          <a:p>
+            <a:pPr algn="l" indent="0" marL="0">
+              <a:buNone/>
+            </a:pPr>
+            <a:r>
+              <a:rPr lang="en-US" sz="1200" dirty="0">
+                <a:solidFill>
+                  <a:srgbClr val="6B7280"/>
+                </a:solidFill>
+                <a:latin typeface="Calibri" pitchFamily="34" charset="0"/>
+                <a:ea typeface="Calibri" pitchFamily="34" charset="-122"/>
+                <a:cs typeface="Calibri" pitchFamily="34" charset="-120"/>
+              </a:rPr>
+              <a:t>Votan los tres: Albert (PO), Anthony y Luis · la EP04 va en el Sprint 3, dividida (ver ejemplo)</a:t>
+            </a:r>
+            <a:endParaRPr lang="en-US" sz="1200" dirty="0"/>
+          </a:p>
+        </p:txBody>
+      </p:sp>
+      <p:sp>
+        <p:nvSpPr>
+          <p:cNvPr id="4" name="obj235"/>
+          <p:cNvSpPr/>
+          <p:nvPr/>
+        </p:nvSpPr>
+        <p:spPr>
+          <a:xfrm>
+            <a:off x="548640" y="1389888"/>
+            <a:ext cx="4160520" cy="841248"/>
+          </a:xfrm>
+          <a:prstGeom prst="roundRect">
+            <a:avLst>
+              <a:gd name="adj" fmla="val 15217"/>
+            </a:avLst>
+          </a:prstGeom>
+          <a:solidFill>
+            <a:srgbClr val="F4F4F2"/>
+          </a:solidFill>
+          <a:ln/>
+        </p:spPr>
+      </p:sp>
+      <p:sp>
+        <p:nvSpPr>
+          <p:cNvPr id="5" name="obj236"/>
+          <p:cNvSpPr txBox="1"/>
+          <p:nvPr/>
+        </p:nvSpPr>
+        <p:spPr>
+          <a:xfrm>
+            <a:off x="731520" y="1481328"/>
+            <a:ext cx="1097280" cy="228600"/>
+          </a:xfrm>
+          <a:prstGeom prst="rect">
+            <a:avLst/>
+          </a:prstGeom>
+          <a:noFill/>
+          <a:ln/>
+        </p:spPr>
+        <p:txBody>
+          <a:bodyPr wrap="square" lIns="0" tIns="0" rIns="0" bIns="0" rtlCol="0" anchor="t"/>
+          <a:lstStyle/>
+          <a:p>
+            <a:pPr algn="l" indent="0" marL="0">
+              <a:buNone/>
+            </a:pPr>
+            <a:r>
+              <a:rPr lang="en-US" sz="1000" b="1" spc="100" kern="0" dirty="0">
+                <a:solidFill>
+                  <a:srgbClr val="F2643D"/>
+                </a:solidFill>
+                <a:latin typeface="Calibri" pitchFamily="34" charset="0"/>
+                <a:ea typeface="Calibri" pitchFamily="34" charset="-122"/>
+                <a:cs typeface="Calibri" pitchFamily="34" charset="-120"/>
+              </a:rPr>
+              <a:t>SPRINT 1</a:t>
+            </a:r>
+            <a:endParaRPr lang="en-US" sz="1000" dirty="0"/>
+          </a:p>
+        </p:txBody>
+      </p:sp>
+      <p:sp>
+        <p:nvSpPr>
+          <p:cNvPr id="6" name="obj237"/>
+          <p:cNvSpPr txBox="1"/>
+          <p:nvPr/>
+        </p:nvSpPr>
+        <p:spPr>
+          <a:xfrm>
+            <a:off x="731520" y="1700784"/>
+            <a:ext cx="3840480" cy="457200"/>
+          </a:xfrm>
+          <a:prstGeom prst="rect">
+            <a:avLst/>
+          </a:prstGeom>
+          <a:noFill/>
+          <a:ln/>
+        </p:spPr>
+        <p:txBody>
+          <a:bodyPr wrap="square" lIns="0" tIns="0" rIns="0" bIns="0" rtlCol="0" anchor="t"/>
+          <a:lstStyle/>
+          <a:p>
+            <a:pPr algn="l" indent="0" marL="0">
+              <a:buNone/>
+            </a:pPr>
+            <a:r>
+              <a:rPr lang="en-US" sz="1300" b="1" dirty="0">
+                <a:solidFill>
+                  <a:srgbClr val="1F2421"/>
+                </a:solidFill>
+                <a:latin typeface="Calibri" pitchFamily="34" charset="0"/>
+                <a:ea typeface="Calibri" pitchFamily="34" charset="-122"/>
+                <a:cs typeface="Calibri" pitchFamily="34" charset="-120"/>
+              </a:rPr>
+              <a:t>¿EP01 (HU01–HU02) entra completa al Sprint 1?</a:t>
+            </a:r>
+            <a:endParaRPr lang="en-US" sz="1300" dirty="0"/>
+          </a:p>
+        </p:txBody>
+      </p:sp>
+      <p:sp>
+        <p:nvSpPr>
+          <p:cNvPr id="7" name="obj238"/>
+          <p:cNvSpPr/>
+          <p:nvPr/>
+        </p:nvSpPr>
+        <p:spPr>
+          <a:xfrm>
+            <a:off x="5044928" y="1536777"/>
+            <a:ext cx="53767" cy="184343"/>
+          </a:xfrm>
+          <a:prstGeom prst="roundRect">
+            <a:avLst>
+              <a:gd name="adj" fmla="val 50000"/>
+            </a:avLst>
+          </a:prstGeom>
+          <a:solidFill>
+            <a:srgbClr val="2F9E6E"/>
+          </a:solidFill>
+          <a:ln/>
+        </p:spPr>
+      </p:sp>
+      <p:sp>
+        <p:nvSpPr>
+          <p:cNvPr id="8" name="obj239"/>
+          <p:cNvSpPr/>
+          <p:nvPr/>
+        </p:nvSpPr>
+        <p:spPr>
+          <a:xfrm>
+            <a:off x="5114056" y="1518343"/>
+            <a:ext cx="53767" cy="202777"/>
+          </a:xfrm>
+          <a:prstGeom prst="roundRect">
+            <a:avLst>
+              <a:gd name="adj" fmla="val 50000"/>
+            </a:avLst>
+          </a:prstGeom>
+          <a:solidFill>
+            <a:srgbClr val="2F9E6E"/>
+          </a:solidFill>
+          <a:ln/>
+        </p:spPr>
+      </p:sp>
+      <p:sp>
+        <p:nvSpPr>
+          <p:cNvPr id="9" name="obj240"/>
+          <p:cNvSpPr/>
+          <p:nvPr/>
+        </p:nvSpPr>
+        <p:spPr>
+          <a:xfrm>
+            <a:off x="5183185" y="1536777"/>
+            <a:ext cx="53767" cy="184343"/>
+          </a:xfrm>
+          <a:prstGeom prst="roundRect">
+            <a:avLst>
+              <a:gd name="adj" fmla="val 50000"/>
+            </a:avLst>
+          </a:prstGeom>
+          <a:solidFill>
+            <a:srgbClr val="2F9E6E"/>
+          </a:solidFill>
+          <a:ln/>
+        </p:spPr>
+      </p:sp>
+      <p:sp>
+        <p:nvSpPr>
+          <p:cNvPr id="10" name="obj241"/>
+          <p:cNvSpPr/>
+          <p:nvPr/>
+        </p:nvSpPr>
+        <p:spPr>
+          <a:xfrm>
+            <a:off x="5252314" y="1573646"/>
+            <a:ext cx="53767" cy="147474"/>
+          </a:xfrm>
+          <a:prstGeom prst="roundRect">
+            <a:avLst>
+              <a:gd name="adj" fmla="val 50000"/>
+            </a:avLst>
+          </a:prstGeom>
+          <a:solidFill>
+            <a:srgbClr val="2F9E6E"/>
+          </a:solidFill>
+          <a:ln/>
+        </p:spPr>
+      </p:sp>
+      <p:sp>
+        <p:nvSpPr>
+          <p:cNvPr id="11" name="obj242"/>
+          <p:cNvSpPr/>
+          <p:nvPr/>
+        </p:nvSpPr>
+        <p:spPr>
+          <a:xfrm rot="-1920000">
+            <a:off x="4991161" y="1656600"/>
+            <a:ext cx="57607" cy="156692"/>
+          </a:xfrm>
+          <a:prstGeom prst="roundRect">
+            <a:avLst>
+              <a:gd name="adj" fmla="val 50000"/>
+            </a:avLst>
+          </a:prstGeom>
+          <a:solidFill>
+            <a:srgbClr val="2F9E6E"/>
+          </a:solidFill>
+          <a:ln/>
+        </p:spPr>
+      </p:sp>
+      <p:sp>
+        <p:nvSpPr>
+          <p:cNvPr id="12" name="obj243"/>
+          <p:cNvSpPr/>
+          <p:nvPr/>
+        </p:nvSpPr>
+        <p:spPr>
+          <a:xfrm>
+            <a:off x="5037247" y="1693469"/>
+            <a:ext cx="276515" cy="211994"/>
+          </a:xfrm>
+          <a:prstGeom prst="roundRect">
+            <a:avLst>
+              <a:gd name="adj" fmla="val 28986"/>
+            </a:avLst>
+          </a:prstGeom>
+          <a:solidFill>
+            <a:srgbClr val="2F9E6E"/>
+          </a:solidFill>
+          <a:ln/>
+        </p:spPr>
+      </p:sp>
+      <p:sp>
+        <p:nvSpPr>
+          <p:cNvPr id="13" name="obj244"/>
+          <p:cNvSpPr txBox="1"/>
+          <p:nvPr/>
+        </p:nvSpPr>
+        <p:spPr>
+          <a:xfrm>
+            <a:off x="5422392" y="1481328"/>
+            <a:ext cx="365760" cy="457200"/>
+          </a:xfrm>
+          <a:prstGeom prst="rect">
+            <a:avLst/>
+          </a:prstGeom>
+          <a:noFill/>
+          <a:ln/>
+        </p:spPr>
+        <p:txBody>
+          <a:bodyPr wrap="square" lIns="0" tIns="0" rIns="0" bIns="0" rtlCol="0" anchor="ctr"/>
+          <a:lstStyle/>
+          <a:p>
+            <a:pPr algn="l" indent="0" marL="0">
+              <a:buNone/>
+            </a:pPr>
+            <a:r>
+              <a:rPr lang="en-US" sz="2400" b="1" dirty="0">
+                <a:solidFill>
+                  <a:srgbClr val="2F9E6E"/>
+                </a:solidFill>
+                <a:latin typeface="Calibri" pitchFamily="34" charset="0"/>
+                <a:ea typeface="Calibri" pitchFamily="34" charset="-122"/>
+                <a:cs typeface="Calibri" pitchFamily="34" charset="-120"/>
+              </a:rPr>
+              <a:t>5</a:t>
+            </a:r>
+            <a:endParaRPr lang="en-US" sz="2400" dirty="0"/>
+          </a:p>
+        </p:txBody>
+      </p:sp>
+      <p:sp>
+        <p:nvSpPr>
+          <p:cNvPr id="14" name="obj245"/>
+          <p:cNvSpPr txBox="1"/>
+          <p:nvPr/>
+        </p:nvSpPr>
+        <p:spPr>
+          <a:xfrm>
+            <a:off x="4892040" y="1965960"/>
+            <a:ext cx="822960" cy="228600"/>
+          </a:xfrm>
+          <a:prstGeom prst="rect">
+            <a:avLst/>
+          </a:prstGeom>
+          <a:noFill/>
+          <a:ln/>
+        </p:spPr>
+        <p:txBody>
+          <a:bodyPr wrap="square" lIns="0" tIns="0" rIns="0" bIns="0" rtlCol="0" anchor="t"/>
+          <a:lstStyle/>
+          <a:p>
+            <a:pPr algn="l" indent="0" marL="0">
+              <a:buNone/>
+            </a:pPr>
+            <a:r>
+              <a:rPr lang="en-US" sz="1000" dirty="0">
+                <a:solidFill>
+                  <a:srgbClr val="6B7280"/>
+                </a:solidFill>
+                <a:latin typeface="Calibri" pitchFamily="34" charset="0"/>
+                <a:ea typeface="Calibri" pitchFamily="34" charset="-122"/>
+                <a:cs typeface="Calibri" pitchFamily="34" charset="-120"/>
+              </a:rPr>
+              <a:t>Albert</a:t>
+            </a:r>
+            <a:endParaRPr lang="en-US" sz="1000" dirty="0"/>
+          </a:p>
+        </p:txBody>
+      </p:sp>
+      <p:sp>
+        <p:nvSpPr>
+          <p:cNvPr id="15" name="obj246"/>
+          <p:cNvSpPr/>
+          <p:nvPr/>
+        </p:nvSpPr>
+        <p:spPr>
+          <a:xfrm>
+            <a:off x="5886176" y="1536777"/>
+            <a:ext cx="53767" cy="184343"/>
+          </a:xfrm>
+          <a:prstGeom prst="roundRect">
+            <a:avLst>
+              <a:gd name="adj" fmla="val 50000"/>
+            </a:avLst>
+          </a:prstGeom>
+          <a:solidFill>
+            <a:srgbClr val="2F9E6E"/>
+          </a:solidFill>
+          <a:ln/>
+        </p:spPr>
+      </p:sp>
+      <p:sp>
+        <p:nvSpPr>
+          <p:cNvPr id="16" name="obj247"/>
+          <p:cNvSpPr/>
+          <p:nvPr/>
+        </p:nvSpPr>
+        <p:spPr>
+          <a:xfrm>
+            <a:off x="5955304" y="1518343"/>
+            <a:ext cx="53767" cy="202777"/>
+          </a:xfrm>
+          <a:prstGeom prst="roundRect">
+            <a:avLst>
+              <a:gd name="adj" fmla="val 50000"/>
+            </a:avLst>
+          </a:prstGeom>
+          <a:solidFill>
+            <a:srgbClr val="2F9E6E"/>
+          </a:solidFill>
+          <a:ln/>
+        </p:spPr>
+      </p:sp>
+      <p:sp>
+        <p:nvSpPr>
+          <p:cNvPr id="17" name="obj248"/>
+          <p:cNvSpPr/>
+          <p:nvPr/>
+        </p:nvSpPr>
+        <p:spPr>
+          <a:xfrm>
+            <a:off x="6024433" y="1536777"/>
+            <a:ext cx="53767" cy="184343"/>
+          </a:xfrm>
+          <a:prstGeom prst="roundRect">
+            <a:avLst>
+              <a:gd name="adj" fmla="val 50000"/>
+            </a:avLst>
+          </a:prstGeom>
+          <a:solidFill>
+            <a:srgbClr val="2F9E6E"/>
+          </a:solidFill>
+          <a:ln/>
+        </p:spPr>
+      </p:sp>
+      <p:sp>
+        <p:nvSpPr>
+          <p:cNvPr id="18" name="obj249"/>
+          <p:cNvSpPr/>
+          <p:nvPr/>
+        </p:nvSpPr>
+        <p:spPr>
+          <a:xfrm>
+            <a:off x="6093562" y="1573646"/>
+            <a:ext cx="53767" cy="147474"/>
+          </a:xfrm>
+          <a:prstGeom prst="roundRect">
+            <a:avLst>
+              <a:gd name="adj" fmla="val 50000"/>
+            </a:avLst>
+          </a:prstGeom>
+          <a:solidFill>
+            <a:srgbClr val="2F9E6E"/>
+          </a:solidFill>
+          <a:ln/>
+        </p:spPr>
+      </p:sp>
+      <p:sp>
+        <p:nvSpPr>
+          <p:cNvPr id="19" name="obj250"/>
+          <p:cNvSpPr/>
+          <p:nvPr/>
+        </p:nvSpPr>
+        <p:spPr>
+          <a:xfrm>
+            <a:off x="5878495" y="1693469"/>
+            <a:ext cx="276515" cy="211994"/>
+          </a:xfrm>
+          <a:prstGeom prst="roundRect">
+            <a:avLst>
+              <a:gd name="adj" fmla="val 28986"/>
+            </a:avLst>
+          </a:prstGeom>
+          <a:solidFill>
+            <a:srgbClr val="2F9E6E"/>
+          </a:solidFill>
+          <a:ln/>
+        </p:spPr>
+      </p:sp>
+      <p:sp>
+        <p:nvSpPr>
+          <p:cNvPr id="20" name="obj251"/>
+          <p:cNvSpPr txBox="1"/>
+          <p:nvPr/>
+        </p:nvSpPr>
+        <p:spPr>
+          <a:xfrm>
+            <a:off x="6263640" y="1481328"/>
+            <a:ext cx="365760" cy="457200"/>
+          </a:xfrm>
+          <a:prstGeom prst="rect">
+            <a:avLst/>
+          </a:prstGeom>
+          <a:noFill/>
+          <a:ln/>
+        </p:spPr>
+        <p:txBody>
+          <a:bodyPr wrap="square" lIns="0" tIns="0" rIns="0" bIns="0" rtlCol="0" anchor="ctr"/>
+          <a:lstStyle/>
+          <a:p>
+            <a:pPr algn="l" indent="0" marL="0">
+              <a:buNone/>
+            </a:pPr>
+            <a:r>
+              <a:rPr lang="en-US" sz="2400" b="1" dirty="0">
+                <a:solidFill>
+                  <a:srgbClr val="2F9E6E"/>
+                </a:solidFill>
+                <a:latin typeface="Calibri" pitchFamily="34" charset="0"/>
+                <a:ea typeface="Calibri" pitchFamily="34" charset="-122"/>
+                <a:cs typeface="Calibri" pitchFamily="34" charset="-120"/>
+              </a:rPr>
+              <a:t>4</a:t>
+            </a:r>
+            <a:endParaRPr lang="en-US" sz="2400" dirty="0"/>
+          </a:p>
+        </p:txBody>
+      </p:sp>
+      <p:sp>
+        <p:nvSpPr>
+          <p:cNvPr id="21" name="obj252"/>
+          <p:cNvSpPr txBox="1"/>
+          <p:nvPr/>
+        </p:nvSpPr>
+        <p:spPr>
+          <a:xfrm>
+            <a:off x="5733288" y="1965960"/>
+            <a:ext cx="822960" cy="228600"/>
+          </a:xfrm>
+          <a:prstGeom prst="rect">
+            <a:avLst/>
+          </a:prstGeom>
+          <a:noFill/>
+          <a:ln/>
+        </p:spPr>
+        <p:txBody>
+          <a:bodyPr wrap="square" lIns="0" tIns="0" rIns="0" bIns="0" rtlCol="0" anchor="t"/>
+          <a:lstStyle/>
+          <a:p>
+            <a:pPr algn="l" indent="0" marL="0">
+              <a:buNone/>
+            </a:pPr>
+            <a:r>
+              <a:rPr lang="en-US" sz="1000" dirty="0">
+                <a:solidFill>
+                  <a:srgbClr val="6B7280"/>
+                </a:solidFill>
+                <a:latin typeface="Calibri" pitchFamily="34" charset="0"/>
+                <a:ea typeface="Calibri" pitchFamily="34" charset="-122"/>
+                <a:cs typeface="Calibri" pitchFamily="34" charset="-120"/>
+              </a:rPr>
+              <a:t>Anthony</a:t>
+            </a:r>
+            <a:endParaRPr lang="en-US" sz="1000" dirty="0"/>
+          </a:p>
+        </p:txBody>
+      </p:sp>
+      <p:sp>
+        <p:nvSpPr>
+          <p:cNvPr id="22" name="obj253"/>
+          <p:cNvSpPr/>
+          <p:nvPr/>
+        </p:nvSpPr>
+        <p:spPr>
+          <a:xfrm>
+            <a:off x="6727424" y="1536777"/>
+            <a:ext cx="53767" cy="184343"/>
+          </a:xfrm>
+          <a:prstGeom prst="roundRect">
+            <a:avLst>
+              <a:gd name="adj" fmla="val 50000"/>
+            </a:avLst>
+          </a:prstGeom>
+          <a:solidFill>
+            <a:srgbClr val="2F9E6E"/>
+          </a:solidFill>
+          <a:ln/>
+        </p:spPr>
+      </p:sp>
+      <p:sp>
+        <p:nvSpPr>
+          <p:cNvPr id="23" name="obj254"/>
+          <p:cNvSpPr/>
+          <p:nvPr/>
+        </p:nvSpPr>
+        <p:spPr>
+          <a:xfrm>
+            <a:off x="6796552" y="1518343"/>
+            <a:ext cx="53767" cy="202777"/>
+          </a:xfrm>
+          <a:prstGeom prst="roundRect">
+            <a:avLst>
+              <a:gd name="adj" fmla="val 50000"/>
+            </a:avLst>
+          </a:prstGeom>
+          <a:solidFill>
+            <a:srgbClr val="2F9E6E"/>
+          </a:solidFill>
+          <a:ln/>
+        </p:spPr>
+      </p:sp>
+      <p:sp>
+        <p:nvSpPr>
+          <p:cNvPr id="24" name="obj255"/>
+          <p:cNvSpPr/>
+          <p:nvPr/>
+        </p:nvSpPr>
+        <p:spPr>
+          <a:xfrm>
+            <a:off x="6865681" y="1536777"/>
+            <a:ext cx="53767" cy="184343"/>
+          </a:xfrm>
+          <a:prstGeom prst="roundRect">
+            <a:avLst>
+              <a:gd name="adj" fmla="val 50000"/>
+            </a:avLst>
+          </a:prstGeom>
+          <a:solidFill>
+            <a:srgbClr val="2F9E6E"/>
+          </a:solidFill>
+          <a:ln/>
+        </p:spPr>
+      </p:sp>
+      <p:sp>
+        <p:nvSpPr>
+          <p:cNvPr id="25" name="obj256"/>
+          <p:cNvSpPr/>
+          <p:nvPr/>
+        </p:nvSpPr>
+        <p:spPr>
+          <a:xfrm>
+            <a:off x="6934810" y="1573646"/>
+            <a:ext cx="53767" cy="147474"/>
+          </a:xfrm>
+          <a:prstGeom prst="roundRect">
+            <a:avLst>
+              <a:gd name="adj" fmla="val 50000"/>
+            </a:avLst>
+          </a:prstGeom>
+          <a:solidFill>
+            <a:srgbClr val="2F9E6E"/>
+          </a:solidFill>
+          <a:ln/>
+        </p:spPr>
+      </p:sp>
+      <p:sp>
+        <p:nvSpPr>
+          <p:cNvPr id="26" name="obj257"/>
+          <p:cNvSpPr/>
+          <p:nvPr/>
+        </p:nvSpPr>
+        <p:spPr>
+          <a:xfrm rot="-1920000">
+            <a:off x="6673657" y="1656600"/>
+            <a:ext cx="57607" cy="156692"/>
+          </a:xfrm>
+          <a:prstGeom prst="roundRect">
+            <a:avLst>
+              <a:gd name="adj" fmla="val 50000"/>
+            </a:avLst>
+          </a:prstGeom>
+          <a:solidFill>
+            <a:srgbClr val="2F9E6E"/>
+          </a:solidFill>
+          <a:ln/>
+        </p:spPr>
+      </p:sp>
+      <p:sp>
+        <p:nvSpPr>
+          <p:cNvPr id="27" name="obj258"/>
+          <p:cNvSpPr/>
+          <p:nvPr/>
+        </p:nvSpPr>
+        <p:spPr>
+          <a:xfrm>
+            <a:off x="6719743" y="1693469"/>
+            <a:ext cx="276515" cy="211994"/>
+          </a:xfrm>
+          <a:prstGeom prst="roundRect">
+            <a:avLst>
+              <a:gd name="adj" fmla="val 28986"/>
+            </a:avLst>
+          </a:prstGeom>
+          <a:solidFill>
+            <a:srgbClr val="2F9E6E"/>
+          </a:solidFill>
+          <a:ln/>
+        </p:spPr>
+      </p:sp>
+      <p:sp>
+        <p:nvSpPr>
+          <p:cNvPr id="28" name="obj259"/>
+          <p:cNvSpPr txBox="1"/>
+          <p:nvPr/>
+        </p:nvSpPr>
+        <p:spPr>
+          <a:xfrm>
+            <a:off x="7104888" y="1481328"/>
+            <a:ext cx="365760" cy="457200"/>
+          </a:xfrm>
+          <a:prstGeom prst="rect">
+            <a:avLst/>
+          </a:prstGeom>
+          <a:noFill/>
+          <a:ln/>
+        </p:spPr>
+        <p:txBody>
+          <a:bodyPr wrap="square" lIns="0" tIns="0" rIns="0" bIns="0" rtlCol="0" anchor="ctr"/>
+          <a:lstStyle/>
+          <a:p>
+            <a:pPr algn="l" indent="0" marL="0">
+              <a:buNone/>
+            </a:pPr>
+            <a:r>
+              <a:rPr lang="en-US" sz="2400" b="1" dirty="0">
+                <a:solidFill>
+                  <a:srgbClr val="2F9E6E"/>
+                </a:solidFill>
+                <a:latin typeface="Calibri" pitchFamily="34" charset="0"/>
+                <a:ea typeface="Calibri" pitchFamily="34" charset="-122"/>
+                <a:cs typeface="Calibri" pitchFamily="34" charset="-120"/>
+              </a:rPr>
+              <a:t>5</a:t>
+            </a:r>
+            <a:endParaRPr lang="en-US" sz="2400" dirty="0"/>
+          </a:p>
+        </p:txBody>
+      </p:sp>
+      <p:sp>
+        <p:nvSpPr>
+          <p:cNvPr id="29" name="obj260"/>
+          <p:cNvSpPr txBox="1"/>
+          <p:nvPr/>
+        </p:nvSpPr>
+        <p:spPr>
+          <a:xfrm>
+            <a:off x="6574536" y="1965960"/>
+            <a:ext cx="822960" cy="228600"/>
+          </a:xfrm>
+          <a:prstGeom prst="rect">
+            <a:avLst/>
+          </a:prstGeom>
+          <a:noFill/>
+          <a:ln/>
+        </p:spPr>
+        <p:txBody>
+          <a:bodyPr wrap="square" lIns="0" tIns="0" rIns="0" bIns="0" rtlCol="0" anchor="t"/>
+          <a:lstStyle/>
+          <a:p>
+            <a:pPr algn="l" indent="0" marL="0">
+              <a:buNone/>
+            </a:pPr>
+            <a:r>
+              <a:rPr lang="en-US" sz="1000" dirty="0">
+                <a:solidFill>
+                  <a:srgbClr val="6B7280"/>
+                </a:solidFill>
+                <a:latin typeface="Calibri" pitchFamily="34" charset="0"/>
+                <a:ea typeface="Calibri" pitchFamily="34" charset="-122"/>
+                <a:cs typeface="Calibri" pitchFamily="34" charset="-120"/>
+              </a:rPr>
+              <a:t>Luis</a:t>
+            </a:r>
+            <a:endParaRPr lang="en-US" sz="1000" dirty="0"/>
+          </a:p>
+        </p:txBody>
+      </p:sp>
+      <p:sp>
+        <p:nvSpPr>
+          <p:cNvPr id="30" name="obj261"/>
+          <p:cNvSpPr/>
+          <p:nvPr/>
+        </p:nvSpPr>
+        <p:spPr>
+          <a:xfrm>
+            <a:off x="7498080" y="1536192"/>
+            <a:ext cx="1097280" cy="548640"/>
+          </a:xfrm>
+          <a:prstGeom prst="roundRect">
+            <a:avLst>
+              <a:gd name="adj" fmla="val 20000"/>
+            </a:avLst>
+          </a:prstGeom>
+          <a:solidFill>
+            <a:srgbClr val="2F9E6E">
+              <a:alpha val="18000"/>
+            </a:srgbClr>
+          </a:solidFill>
+          <a:ln/>
+        </p:spPr>
+      </p:sp>
+      <p:sp>
+        <p:nvSpPr>
+          <p:cNvPr id="31" name="obj262"/>
+          <p:cNvSpPr txBox="1"/>
+          <p:nvPr/>
+        </p:nvSpPr>
+        <p:spPr>
+          <a:xfrm>
+            <a:off x="7543800" y="1536192"/>
+            <a:ext cx="1005840" cy="548640"/>
+          </a:xfrm>
+          <a:prstGeom prst="rect">
+            <a:avLst/>
+          </a:prstGeom>
+          <a:noFill/>
+          <a:ln/>
+        </p:spPr>
+        <p:txBody>
+          <a:bodyPr wrap="square" lIns="0" tIns="0" rIns="0" bIns="0" rtlCol="0" anchor="ctr"/>
+          <a:lstStyle/>
+          <a:p>
+            <a:pPr algn="ctr" indent="0" marL="0">
+              <a:buNone/>
+            </a:pPr>
+            <a:r>
+              <a:rPr lang="en-US" sz="1050" b="1" dirty="0">
+                <a:solidFill>
+                  <a:srgbClr val="1F2421"/>
+                </a:solidFill>
+                <a:latin typeface="Calibri" pitchFamily="34" charset="0"/>
+                <a:ea typeface="Calibri" pitchFamily="34" charset="-122"/>
+                <a:cs typeface="Calibri" pitchFamily="34" charset="-120"/>
+              </a:rPr>
+              <a:t>Aprobado</a:t>
+            </a:r>
+            <a:endParaRPr lang="en-US" sz="1050" dirty="0"/>
+          </a:p>
+        </p:txBody>
+      </p:sp>
+      <p:sp>
+        <p:nvSpPr>
+          <p:cNvPr id="32" name="obj263"/>
+          <p:cNvSpPr/>
+          <p:nvPr/>
+        </p:nvSpPr>
+        <p:spPr>
+          <a:xfrm>
+            <a:off x="548640" y="2414016"/>
+            <a:ext cx="4160520" cy="841248"/>
+          </a:xfrm>
+          <a:prstGeom prst="roundRect">
+            <a:avLst>
+              <a:gd name="adj" fmla="val 15217"/>
+            </a:avLst>
+          </a:prstGeom>
+          <a:solidFill>
+            <a:srgbClr val="F4F4F2"/>
+          </a:solidFill>
+          <a:ln/>
+        </p:spPr>
+      </p:sp>
+      <p:sp>
+        <p:nvSpPr>
+          <p:cNvPr id="33" name="obj264"/>
+          <p:cNvSpPr txBox="1"/>
+          <p:nvPr/>
+        </p:nvSpPr>
+        <p:spPr>
+          <a:xfrm>
+            <a:off x="731520" y="2505456"/>
+            <a:ext cx="1097280" cy="228600"/>
+          </a:xfrm>
+          <a:prstGeom prst="rect">
+            <a:avLst/>
+          </a:prstGeom>
+          <a:noFill/>
+          <a:ln/>
+        </p:spPr>
+        <p:txBody>
+          <a:bodyPr wrap="square" lIns="0" tIns="0" rIns="0" bIns="0" rtlCol="0" anchor="t"/>
+          <a:lstStyle/>
+          <a:p>
+            <a:pPr algn="l" indent="0" marL="0">
+              <a:buNone/>
+            </a:pPr>
+            <a:r>
+              <a:rPr lang="en-US" sz="1000" b="1" spc="100" kern="0" dirty="0">
+                <a:solidFill>
+                  <a:srgbClr val="F2643D"/>
+                </a:solidFill>
+                <a:latin typeface="Calibri" pitchFamily="34" charset="0"/>
+                <a:ea typeface="Calibri" pitchFamily="34" charset="-122"/>
+                <a:cs typeface="Calibri" pitchFamily="34" charset="-120"/>
+              </a:rPr>
+              <a:t>SPRINT 2</a:t>
+            </a:r>
+            <a:endParaRPr lang="en-US" sz="1000" dirty="0"/>
+          </a:p>
+        </p:txBody>
+      </p:sp>
+      <p:sp>
+        <p:nvSpPr>
+          <p:cNvPr id="34" name="obj265"/>
+          <p:cNvSpPr txBox="1"/>
+          <p:nvPr/>
+        </p:nvSpPr>
+        <p:spPr>
+          <a:xfrm>
+            <a:off x="731520" y="2724912"/>
+            <a:ext cx="3840480" cy="457200"/>
+          </a:xfrm>
+          <a:prstGeom prst="rect">
+            <a:avLst/>
+          </a:prstGeom>
+          <a:noFill/>
+          <a:ln/>
+        </p:spPr>
+        <p:txBody>
+          <a:bodyPr wrap="square" lIns="0" tIns="0" rIns="0" bIns="0" rtlCol="0" anchor="t"/>
+          <a:lstStyle/>
+          <a:p>
+            <a:pPr algn="l" indent="0" marL="0">
+              <a:buNone/>
+            </a:pPr>
+            <a:r>
+              <a:rPr lang="en-US" sz="1300" b="1" dirty="0">
+                <a:solidFill>
+                  <a:srgbClr val="1F2421"/>
+                </a:solidFill>
+                <a:latin typeface="Calibri" pitchFamily="34" charset="0"/>
+                <a:ea typeface="Calibri" pitchFamily="34" charset="-122"/>
+                <a:cs typeface="Calibri" pitchFamily="34" charset="-120"/>
+              </a:rPr>
+              <a:t>¿EP02 y EP03 (HU03–HU06) juntas en el Sprint 2?</a:t>
+            </a:r>
+            <a:endParaRPr lang="en-US" sz="1300" dirty="0"/>
+          </a:p>
+        </p:txBody>
+      </p:sp>
+      <p:sp>
+        <p:nvSpPr>
+          <p:cNvPr id="35" name="obj266"/>
+          <p:cNvSpPr/>
+          <p:nvPr/>
+        </p:nvSpPr>
+        <p:spPr>
+          <a:xfrm>
+            <a:off x="5044928" y="2560905"/>
+            <a:ext cx="53767" cy="184343"/>
+          </a:xfrm>
+          <a:prstGeom prst="roundRect">
+            <a:avLst>
+              <a:gd name="adj" fmla="val 50000"/>
+            </a:avLst>
+          </a:prstGeom>
+          <a:solidFill>
+            <a:srgbClr val="F0A020"/>
+          </a:solidFill>
+          <a:ln/>
+        </p:spPr>
+      </p:sp>
+      <p:sp>
+        <p:nvSpPr>
+          <p:cNvPr id="36" name="obj267"/>
+          <p:cNvSpPr/>
+          <p:nvPr/>
+        </p:nvSpPr>
+        <p:spPr>
+          <a:xfrm>
+            <a:off x="5114056" y="2542471"/>
+            <a:ext cx="53767" cy="202777"/>
+          </a:xfrm>
+          <a:prstGeom prst="roundRect">
+            <a:avLst>
+              <a:gd name="adj" fmla="val 50000"/>
+            </a:avLst>
+          </a:prstGeom>
+          <a:solidFill>
+            <a:srgbClr val="F0A020"/>
+          </a:solidFill>
+          <a:ln/>
+        </p:spPr>
+      </p:sp>
+      <p:sp>
+        <p:nvSpPr>
+          <p:cNvPr id="37" name="obj268"/>
+          <p:cNvSpPr/>
+          <p:nvPr/>
+        </p:nvSpPr>
+        <p:spPr>
+          <a:xfrm>
+            <a:off x="5183185" y="2560905"/>
+            <a:ext cx="53767" cy="184343"/>
+          </a:xfrm>
+          <a:prstGeom prst="roundRect">
+            <a:avLst>
+              <a:gd name="adj" fmla="val 50000"/>
+            </a:avLst>
+          </a:prstGeom>
+          <a:solidFill>
+            <a:srgbClr val="F0A020"/>
+          </a:solidFill>
+          <a:ln/>
+        </p:spPr>
+      </p:sp>
+      <p:sp>
+        <p:nvSpPr>
+          <p:cNvPr id="38" name="obj269"/>
+          <p:cNvSpPr/>
+          <p:nvPr/>
+        </p:nvSpPr>
+        <p:spPr>
+          <a:xfrm>
+            <a:off x="5252314" y="2694554"/>
+            <a:ext cx="53767" cy="50694"/>
+          </a:xfrm>
+          <a:prstGeom prst="roundRect">
+            <a:avLst>
+              <a:gd name="adj" fmla="val 50000"/>
+            </a:avLst>
+          </a:prstGeom>
+          <a:solidFill>
+            <a:srgbClr val="F0A020">
+              <a:alpha val="40000"/>
+            </a:srgbClr>
+          </a:solidFill>
+          <a:ln/>
+        </p:spPr>
+      </p:sp>
+      <p:sp>
+        <p:nvSpPr>
+          <p:cNvPr id="39" name="obj270"/>
+          <p:cNvSpPr/>
+          <p:nvPr/>
+        </p:nvSpPr>
+        <p:spPr>
+          <a:xfrm>
+            <a:off x="5037247" y="2717597"/>
+            <a:ext cx="276515" cy="211994"/>
+          </a:xfrm>
+          <a:prstGeom prst="roundRect">
+            <a:avLst>
+              <a:gd name="adj" fmla="val 28986"/>
+            </a:avLst>
+          </a:prstGeom>
+          <a:solidFill>
+            <a:srgbClr val="F0A020"/>
+          </a:solidFill>
+          <a:ln/>
+        </p:spPr>
+      </p:sp>
+      <p:sp>
+        <p:nvSpPr>
+          <p:cNvPr id="40" name="obj271"/>
+          <p:cNvSpPr txBox="1"/>
+          <p:nvPr/>
+        </p:nvSpPr>
+        <p:spPr>
+          <a:xfrm>
+            <a:off x="5422392" y="2505456"/>
+            <a:ext cx="365760" cy="457200"/>
+          </a:xfrm>
+          <a:prstGeom prst="rect">
+            <a:avLst/>
+          </a:prstGeom>
+          <a:noFill/>
+          <a:ln/>
+        </p:spPr>
+        <p:txBody>
+          <a:bodyPr wrap="square" lIns="0" tIns="0" rIns="0" bIns="0" rtlCol="0" anchor="ctr"/>
+          <a:lstStyle/>
+          <a:p>
+            <a:pPr algn="l" indent="0" marL="0">
+              <a:buNone/>
+            </a:pPr>
+            <a:r>
+              <a:rPr lang="en-US" sz="2400" b="1" dirty="0">
+                <a:solidFill>
+                  <a:srgbClr val="F0A020"/>
+                </a:solidFill>
+                <a:latin typeface="Calibri" pitchFamily="34" charset="0"/>
+                <a:ea typeface="Calibri" pitchFamily="34" charset="-122"/>
+                <a:cs typeface="Calibri" pitchFamily="34" charset="-120"/>
+              </a:rPr>
+              <a:t>3</a:t>
+            </a:r>
+            <a:endParaRPr lang="en-US" sz="2400" dirty="0"/>
+          </a:p>
+        </p:txBody>
+      </p:sp>
+      <p:sp>
+        <p:nvSpPr>
+          <p:cNvPr id="41" name="obj272"/>
+          <p:cNvSpPr txBox="1"/>
+          <p:nvPr/>
+        </p:nvSpPr>
+        <p:spPr>
+          <a:xfrm>
+            <a:off x="4892040" y="2990088"/>
+            <a:ext cx="822960" cy="228600"/>
+          </a:xfrm>
+          <a:prstGeom prst="rect">
+            <a:avLst/>
+          </a:prstGeom>
+          <a:noFill/>
+          <a:ln/>
+        </p:spPr>
+        <p:txBody>
+          <a:bodyPr wrap="square" lIns="0" tIns="0" rIns="0" bIns="0" rtlCol="0" anchor="t"/>
+          <a:lstStyle/>
+          <a:p>
+            <a:pPr algn="l" indent="0" marL="0">
+              <a:buNone/>
+            </a:pPr>
+            <a:r>
+              <a:rPr lang="en-US" sz="1000" dirty="0">
+                <a:solidFill>
+                  <a:srgbClr val="6B7280"/>
+                </a:solidFill>
+                <a:latin typeface="Calibri" pitchFamily="34" charset="0"/>
+                <a:ea typeface="Calibri" pitchFamily="34" charset="-122"/>
+                <a:cs typeface="Calibri" pitchFamily="34" charset="-120"/>
+              </a:rPr>
+              <a:t>Albert</a:t>
+            </a:r>
+            <a:endParaRPr lang="en-US" sz="1000" dirty="0"/>
+          </a:p>
+        </p:txBody>
+      </p:sp>
+      <p:sp>
+        <p:nvSpPr>
+          <p:cNvPr id="42" name="obj273"/>
+          <p:cNvSpPr/>
+          <p:nvPr/>
+        </p:nvSpPr>
+        <p:spPr>
+          <a:xfrm>
+            <a:off x="5886176" y="2560905"/>
+            <a:ext cx="53767" cy="184343"/>
+          </a:xfrm>
+          <a:prstGeom prst="roundRect">
+            <a:avLst>
+              <a:gd name="adj" fmla="val 50000"/>
+            </a:avLst>
+          </a:prstGeom>
+          <a:solidFill>
+            <a:srgbClr val="2F9E6E"/>
+          </a:solidFill>
+          <a:ln/>
+        </p:spPr>
+      </p:sp>
+      <p:sp>
+        <p:nvSpPr>
+          <p:cNvPr id="43" name="obj274"/>
+          <p:cNvSpPr/>
+          <p:nvPr/>
+        </p:nvSpPr>
+        <p:spPr>
+          <a:xfrm>
+            <a:off x="5955304" y="2542471"/>
+            <a:ext cx="53767" cy="202777"/>
+          </a:xfrm>
+          <a:prstGeom prst="roundRect">
+            <a:avLst>
+              <a:gd name="adj" fmla="val 50000"/>
+            </a:avLst>
+          </a:prstGeom>
+          <a:solidFill>
+            <a:srgbClr val="2F9E6E"/>
+          </a:solidFill>
+          <a:ln/>
+        </p:spPr>
+      </p:sp>
+      <p:sp>
+        <p:nvSpPr>
+          <p:cNvPr id="44" name="obj275"/>
+          <p:cNvSpPr/>
+          <p:nvPr/>
+        </p:nvSpPr>
+        <p:spPr>
+          <a:xfrm>
+            <a:off x="6024433" y="2560905"/>
+            <a:ext cx="53767" cy="184343"/>
+          </a:xfrm>
+          <a:prstGeom prst="roundRect">
+            <a:avLst>
+              <a:gd name="adj" fmla="val 50000"/>
+            </a:avLst>
+          </a:prstGeom>
+          <a:solidFill>
+            <a:srgbClr val="2F9E6E"/>
+          </a:solidFill>
+          <a:ln/>
+        </p:spPr>
+      </p:sp>
+      <p:sp>
+        <p:nvSpPr>
+          <p:cNvPr id="45" name="obj276"/>
+          <p:cNvSpPr/>
+          <p:nvPr/>
+        </p:nvSpPr>
+        <p:spPr>
+          <a:xfrm>
+            <a:off x="6093562" y="2597774"/>
+            <a:ext cx="53767" cy="147474"/>
+          </a:xfrm>
+          <a:prstGeom prst="roundRect">
+            <a:avLst>
+              <a:gd name="adj" fmla="val 50000"/>
+            </a:avLst>
+          </a:prstGeom>
+          <a:solidFill>
+            <a:srgbClr val="2F9E6E"/>
+          </a:solidFill>
+          <a:ln/>
+        </p:spPr>
+      </p:sp>
+      <p:sp>
+        <p:nvSpPr>
+          <p:cNvPr id="46" name="obj277"/>
+          <p:cNvSpPr/>
+          <p:nvPr/>
+        </p:nvSpPr>
+        <p:spPr>
+          <a:xfrm>
+            <a:off x="5878495" y="2717597"/>
+            <a:ext cx="276515" cy="211994"/>
+          </a:xfrm>
+          <a:prstGeom prst="roundRect">
+            <a:avLst>
+              <a:gd name="adj" fmla="val 28986"/>
+            </a:avLst>
+          </a:prstGeom>
+          <a:solidFill>
+            <a:srgbClr val="2F9E6E"/>
+          </a:solidFill>
+          <a:ln/>
+        </p:spPr>
+      </p:sp>
+      <p:sp>
+        <p:nvSpPr>
+          <p:cNvPr id="47" name="obj278"/>
+          <p:cNvSpPr txBox="1"/>
+          <p:nvPr/>
+        </p:nvSpPr>
+        <p:spPr>
+          <a:xfrm>
+            <a:off x="6263640" y="2505456"/>
+            <a:ext cx="365760" cy="457200"/>
+          </a:xfrm>
+          <a:prstGeom prst="rect">
+            <a:avLst/>
+          </a:prstGeom>
+          <a:noFill/>
+          <a:ln/>
+        </p:spPr>
+        <p:txBody>
+          <a:bodyPr wrap="square" lIns="0" tIns="0" rIns="0" bIns="0" rtlCol="0" anchor="ctr"/>
+          <a:lstStyle/>
+          <a:p>
+            <a:pPr algn="l" indent="0" marL="0">
+              <a:buNone/>
+            </a:pPr>
+            <a:r>
+              <a:rPr lang="en-US" sz="2400" b="1" dirty="0">
+                <a:solidFill>
+                  <a:srgbClr val="2F9E6E"/>
+                </a:solidFill>
+                <a:latin typeface="Calibri" pitchFamily="34" charset="0"/>
+                <a:ea typeface="Calibri" pitchFamily="34" charset="-122"/>
+                <a:cs typeface="Calibri" pitchFamily="34" charset="-120"/>
+              </a:rPr>
+              <a:t>4</a:t>
+            </a:r>
+            <a:endParaRPr lang="en-US" sz="2400" dirty="0"/>
+          </a:p>
+        </p:txBody>
+      </p:sp>
+      <p:sp>
+        <p:nvSpPr>
+          <p:cNvPr id="48" name="obj279"/>
+          <p:cNvSpPr txBox="1"/>
+          <p:nvPr/>
+        </p:nvSpPr>
+        <p:spPr>
+          <a:xfrm>
+            <a:off x="5733288" y="2990088"/>
+            <a:ext cx="822960" cy="228600"/>
+          </a:xfrm>
+          <a:prstGeom prst="rect">
+            <a:avLst/>
+          </a:prstGeom>
+          <a:noFill/>
+          <a:ln/>
+        </p:spPr>
+        <p:txBody>
+          <a:bodyPr wrap="square" lIns="0" tIns="0" rIns="0" bIns="0" rtlCol="0" anchor="t"/>
+          <a:lstStyle/>
+          <a:p>
+            <a:pPr algn="l" indent="0" marL="0">
+              <a:buNone/>
+            </a:pPr>
+            <a:r>
+              <a:rPr lang="en-US" sz="1000" dirty="0">
+                <a:solidFill>
+                  <a:srgbClr val="6B7280"/>
+                </a:solidFill>
+                <a:latin typeface="Calibri" pitchFamily="34" charset="0"/>
+                <a:ea typeface="Calibri" pitchFamily="34" charset="-122"/>
+                <a:cs typeface="Calibri" pitchFamily="34" charset="-120"/>
+              </a:rPr>
+              <a:t>Anthony</a:t>
+            </a:r>
+            <a:endParaRPr lang="en-US" sz="1000" dirty="0"/>
+          </a:p>
+        </p:txBody>
+      </p:sp>
+      <p:sp>
+        <p:nvSpPr>
+          <p:cNvPr id="49" name="obj280"/>
+          <p:cNvSpPr/>
+          <p:nvPr/>
+        </p:nvSpPr>
+        <p:spPr>
+          <a:xfrm>
+            <a:off x="6727424" y="2560905"/>
+            <a:ext cx="53767" cy="184343"/>
+          </a:xfrm>
+          <a:prstGeom prst="roundRect">
+            <a:avLst>
+              <a:gd name="adj" fmla="val 50000"/>
+            </a:avLst>
+          </a:prstGeom>
+          <a:solidFill>
+            <a:srgbClr val="F0A020"/>
+          </a:solidFill>
+          <a:ln/>
+        </p:spPr>
+      </p:sp>
+      <p:sp>
+        <p:nvSpPr>
+          <p:cNvPr id="50" name="obj281"/>
+          <p:cNvSpPr/>
+          <p:nvPr/>
+        </p:nvSpPr>
+        <p:spPr>
+          <a:xfrm>
+            <a:off x="6796552" y="2542471"/>
+            <a:ext cx="53767" cy="202777"/>
+          </a:xfrm>
+          <a:prstGeom prst="roundRect">
+            <a:avLst>
+              <a:gd name="adj" fmla="val 50000"/>
+            </a:avLst>
+          </a:prstGeom>
+          <a:solidFill>
+            <a:srgbClr val="F0A020"/>
+          </a:solidFill>
+          <a:ln/>
+        </p:spPr>
+      </p:sp>
+      <p:sp>
+        <p:nvSpPr>
+          <p:cNvPr id="51" name="obj282"/>
+          <p:cNvSpPr/>
+          <p:nvPr/>
+        </p:nvSpPr>
+        <p:spPr>
+          <a:xfrm>
+            <a:off x="6865681" y="2560905"/>
+            <a:ext cx="53767" cy="184343"/>
+          </a:xfrm>
+          <a:prstGeom prst="roundRect">
+            <a:avLst>
+              <a:gd name="adj" fmla="val 50000"/>
+            </a:avLst>
+          </a:prstGeom>
+          <a:solidFill>
+            <a:srgbClr val="F0A020"/>
+          </a:solidFill>
+          <a:ln/>
+        </p:spPr>
+      </p:sp>
+      <p:sp>
+        <p:nvSpPr>
+          <p:cNvPr id="52" name="obj283"/>
+          <p:cNvSpPr/>
+          <p:nvPr/>
+        </p:nvSpPr>
+        <p:spPr>
+          <a:xfrm>
+            <a:off x="6934810" y="2694554"/>
+            <a:ext cx="53767" cy="50694"/>
+          </a:xfrm>
+          <a:prstGeom prst="roundRect">
+            <a:avLst>
+              <a:gd name="adj" fmla="val 50000"/>
+            </a:avLst>
+          </a:prstGeom>
+          <a:solidFill>
+            <a:srgbClr val="F0A020">
+              <a:alpha val="40000"/>
+            </a:srgbClr>
+          </a:solidFill>
+          <a:ln/>
+        </p:spPr>
+      </p:sp>
+      <p:sp>
+        <p:nvSpPr>
+          <p:cNvPr id="53" name="obj284"/>
+          <p:cNvSpPr/>
+          <p:nvPr/>
+        </p:nvSpPr>
+        <p:spPr>
+          <a:xfrm>
+            <a:off x="6719743" y="2717597"/>
+            <a:ext cx="276515" cy="211994"/>
+          </a:xfrm>
+          <a:prstGeom prst="roundRect">
+            <a:avLst>
+              <a:gd name="adj" fmla="val 28986"/>
+            </a:avLst>
+          </a:prstGeom>
+          <a:solidFill>
+            <a:srgbClr val="F0A020"/>
+          </a:solidFill>
+          <a:ln/>
+        </p:spPr>
+      </p:sp>
+      <p:sp>
+        <p:nvSpPr>
+          <p:cNvPr id="54" name="obj285"/>
+          <p:cNvSpPr txBox="1"/>
+          <p:nvPr/>
+        </p:nvSpPr>
+        <p:spPr>
+          <a:xfrm>
+            <a:off x="7104888" y="2505456"/>
+            <a:ext cx="365760" cy="457200"/>
+          </a:xfrm>
+          <a:prstGeom prst="rect">
+            <a:avLst/>
+          </a:prstGeom>
+          <a:noFill/>
+          <a:ln/>
+        </p:spPr>
+        <p:txBody>
+          <a:bodyPr wrap="square" lIns="0" tIns="0" rIns="0" bIns="0" rtlCol="0" anchor="ctr"/>
+          <a:lstStyle/>
+          <a:p>
+            <a:pPr algn="l" indent="0" marL="0">
+              <a:buNone/>
+            </a:pPr>
+            <a:r>
+              <a:rPr lang="en-US" sz="2400" b="1" dirty="0">
+                <a:solidFill>
+                  <a:srgbClr val="F0A020"/>
+                </a:solidFill>
+                <a:latin typeface="Calibri" pitchFamily="34" charset="0"/>
+                <a:ea typeface="Calibri" pitchFamily="34" charset="-122"/>
+                <a:cs typeface="Calibri" pitchFamily="34" charset="-120"/>
+              </a:rPr>
+              <a:t>3</a:t>
+            </a:r>
+            <a:endParaRPr lang="en-US" sz="2400" dirty="0"/>
+          </a:p>
+        </p:txBody>
+      </p:sp>
+      <p:sp>
+        <p:nvSpPr>
+          <p:cNvPr id="55" name="obj286"/>
+          <p:cNvSpPr txBox="1"/>
+          <p:nvPr/>
+        </p:nvSpPr>
+        <p:spPr>
+          <a:xfrm>
+            <a:off x="6574536" y="2990088"/>
+            <a:ext cx="822960" cy="228600"/>
+          </a:xfrm>
+          <a:prstGeom prst="rect">
+            <a:avLst/>
+          </a:prstGeom>
+          <a:noFill/>
+          <a:ln/>
+        </p:spPr>
+        <p:txBody>
+          <a:bodyPr wrap="square" lIns="0" tIns="0" rIns="0" bIns="0" rtlCol="0" anchor="t"/>
+          <a:lstStyle/>
+          <a:p>
+            <a:pPr algn="l" indent="0" marL="0">
+              <a:buNone/>
+            </a:pPr>
+            <a:r>
+              <a:rPr lang="en-US" sz="1000" dirty="0">
+                <a:solidFill>
+                  <a:srgbClr val="6B7280"/>
+                </a:solidFill>
+                <a:latin typeface="Calibri" pitchFamily="34" charset="0"/>
+                <a:ea typeface="Calibri" pitchFamily="34" charset="-122"/>
+                <a:cs typeface="Calibri" pitchFamily="34" charset="-120"/>
+              </a:rPr>
+              <a:t>Luis</a:t>
+            </a:r>
+            <a:endParaRPr lang="en-US" sz="1000" dirty="0"/>
+          </a:p>
+        </p:txBody>
+      </p:sp>
+      <p:sp>
+        <p:nvSpPr>
+          <p:cNvPr id="56" name="obj287"/>
+          <p:cNvSpPr/>
+          <p:nvPr/>
+        </p:nvSpPr>
+        <p:spPr>
+          <a:xfrm>
+            <a:off x="7498080" y="2560320"/>
+            <a:ext cx="1097280" cy="548640"/>
+          </a:xfrm>
+          <a:prstGeom prst="roundRect">
+            <a:avLst>
+              <a:gd name="adj" fmla="val 20000"/>
+            </a:avLst>
+          </a:prstGeom>
+          <a:solidFill>
+            <a:srgbClr val="F0A020">
+              <a:alpha val="18000"/>
+            </a:srgbClr>
+          </a:solidFill>
+          <a:ln/>
+        </p:spPr>
+      </p:sp>
+      <p:sp>
+        <p:nvSpPr>
+          <p:cNvPr id="57" name="obj288"/>
+          <p:cNvSpPr txBox="1"/>
+          <p:nvPr/>
+        </p:nvSpPr>
+        <p:spPr>
+          <a:xfrm>
+            <a:off x="7543800" y="2560320"/>
+            <a:ext cx="1005840" cy="548640"/>
+          </a:xfrm>
+          <a:prstGeom prst="rect">
+            <a:avLst/>
+          </a:prstGeom>
+          <a:noFill/>
+          <a:ln/>
+        </p:spPr>
+        <p:txBody>
+          <a:bodyPr wrap="square" lIns="0" tIns="0" rIns="0" bIns="0" rtlCol="0" anchor="ctr"/>
+          <a:lstStyle/>
+          <a:p>
+            <a:pPr algn="ctr" indent="0" marL="0">
+              <a:buNone/>
+            </a:pPr>
+            <a:r>
+              <a:rPr lang="en-US" sz="1050" b="1" dirty="0">
+                <a:solidFill>
+                  <a:srgbClr val="1F2421"/>
+                </a:solidFill>
+                <a:latin typeface="Calibri" pitchFamily="34" charset="0"/>
+                <a:ea typeface="Calibri" pitchFamily="34" charset="-122"/>
+                <a:cs typeface="Calibri" pitchFamily="34" charset="-120"/>
+              </a:rPr>
+              <a:t>Sí, con revisión a mitad del sprint</a:t>
+            </a:r>
+            <a:endParaRPr lang="en-US" sz="1050" dirty="0"/>
+          </a:p>
+        </p:txBody>
+      </p:sp>
+      <p:sp>
+        <p:nvSpPr>
+          <p:cNvPr id="58" name="obj289"/>
+          <p:cNvSpPr/>
+          <p:nvPr/>
+        </p:nvSpPr>
+        <p:spPr>
+          <a:xfrm>
+            <a:off x="548640" y="3438144"/>
+            <a:ext cx="4160520" cy="841248"/>
+          </a:xfrm>
+          <a:prstGeom prst="roundRect">
+            <a:avLst>
+              <a:gd name="adj" fmla="val 15217"/>
+            </a:avLst>
+          </a:prstGeom>
+          <a:solidFill>
+            <a:srgbClr val="F4F4F2"/>
+          </a:solidFill>
+          <a:ln/>
+        </p:spPr>
+      </p:sp>
+      <p:sp>
+        <p:nvSpPr>
+          <p:cNvPr id="59" name="obj290"/>
+          <p:cNvSpPr txBox="1"/>
+          <p:nvPr/>
+        </p:nvSpPr>
+        <p:spPr>
+          <a:xfrm>
+            <a:off x="731520" y="3529584"/>
+            <a:ext cx="1097280" cy="228600"/>
+          </a:xfrm>
+          <a:prstGeom prst="rect">
+            <a:avLst/>
+          </a:prstGeom>
+          <a:noFill/>
+          <a:ln/>
+        </p:spPr>
+        <p:txBody>
+          <a:bodyPr wrap="square" lIns="0" tIns="0" rIns="0" bIns="0" rtlCol="0" anchor="t"/>
+          <a:lstStyle/>
+          <a:p>
+            <a:pPr algn="l" indent="0" marL="0">
+              <a:buNone/>
+            </a:pPr>
+            <a:r>
+              <a:rPr lang="en-US" sz="1000" b="1" spc="100" kern="0" dirty="0">
+                <a:solidFill>
+                  <a:srgbClr val="F2643D"/>
+                </a:solidFill>
+                <a:latin typeface="Calibri" pitchFamily="34" charset="0"/>
+                <a:ea typeface="Calibri" pitchFamily="34" charset="-122"/>
+                <a:cs typeface="Calibri" pitchFamily="34" charset="-120"/>
+              </a:rPr>
+              <a:t>SPRINT 4</a:t>
+            </a:r>
+            <a:endParaRPr lang="en-US" sz="1000" dirty="0"/>
+          </a:p>
+        </p:txBody>
+      </p:sp>
+      <p:sp>
+        <p:nvSpPr>
+          <p:cNvPr id="60" name="obj291"/>
+          <p:cNvSpPr txBox="1"/>
+          <p:nvPr/>
+        </p:nvSpPr>
+        <p:spPr>
+          <a:xfrm>
+            <a:off x="731520" y="3749040"/>
+            <a:ext cx="3840480" cy="457200"/>
+          </a:xfrm>
+          <a:prstGeom prst="rect">
+            <a:avLst/>
+          </a:prstGeom>
+          <a:noFill/>
+          <a:ln/>
+        </p:spPr>
+        <p:txBody>
+          <a:bodyPr wrap="square" lIns="0" tIns="0" rIns="0" bIns="0" rtlCol="0" anchor="t"/>
+          <a:lstStyle/>
+          <a:p>
+            <a:pPr algn="l" indent="0" marL="0">
+              <a:buNone/>
+            </a:pPr>
+            <a:r>
+              <a:rPr lang="en-US" sz="1300" b="1" dirty="0">
+                <a:solidFill>
+                  <a:srgbClr val="1F2421"/>
+                </a:solidFill>
+                <a:latin typeface="Calibri" pitchFamily="34" charset="0"/>
+                <a:ea typeface="Calibri" pitchFamily="34" charset="-122"/>
+                <a:cs typeface="Calibri" pitchFamily="34" charset="-120"/>
+              </a:rPr>
+              <a:t>¿EP05 y EP06 (HU09–HU12) quedan para el Sprint 4?</a:t>
+            </a:r>
+            <a:endParaRPr lang="en-US" sz="1300" dirty="0"/>
+          </a:p>
+        </p:txBody>
+      </p:sp>
+      <p:sp>
+        <p:nvSpPr>
+          <p:cNvPr id="61" name="obj292"/>
+          <p:cNvSpPr/>
+          <p:nvPr/>
+        </p:nvSpPr>
+        <p:spPr>
+          <a:xfrm>
+            <a:off x="5044928" y="3585033"/>
+            <a:ext cx="53767" cy="184343"/>
+          </a:xfrm>
+          <a:prstGeom prst="roundRect">
+            <a:avLst>
+              <a:gd name="adj" fmla="val 50000"/>
+            </a:avLst>
+          </a:prstGeom>
+          <a:solidFill>
+            <a:srgbClr val="2F9E6E"/>
+          </a:solidFill>
+          <a:ln/>
+        </p:spPr>
+      </p:sp>
+      <p:sp>
+        <p:nvSpPr>
+          <p:cNvPr id="62" name="obj293"/>
+          <p:cNvSpPr/>
+          <p:nvPr/>
+        </p:nvSpPr>
+        <p:spPr>
+          <a:xfrm>
+            <a:off x="5114056" y="3566599"/>
+            <a:ext cx="53767" cy="202777"/>
+          </a:xfrm>
+          <a:prstGeom prst="roundRect">
+            <a:avLst>
+              <a:gd name="adj" fmla="val 50000"/>
+            </a:avLst>
+          </a:prstGeom>
+          <a:solidFill>
+            <a:srgbClr val="2F9E6E"/>
+          </a:solidFill>
+          <a:ln/>
+        </p:spPr>
+      </p:sp>
+      <p:sp>
+        <p:nvSpPr>
+          <p:cNvPr id="63" name="obj294"/>
+          <p:cNvSpPr/>
+          <p:nvPr/>
+        </p:nvSpPr>
+        <p:spPr>
+          <a:xfrm>
+            <a:off x="5183185" y="3585033"/>
+            <a:ext cx="53767" cy="184343"/>
+          </a:xfrm>
+          <a:prstGeom prst="roundRect">
+            <a:avLst>
+              <a:gd name="adj" fmla="val 50000"/>
+            </a:avLst>
+          </a:prstGeom>
+          <a:solidFill>
+            <a:srgbClr val="2F9E6E"/>
+          </a:solidFill>
+          <a:ln/>
+        </p:spPr>
+      </p:sp>
+      <p:sp>
+        <p:nvSpPr>
+          <p:cNvPr id="64" name="obj295"/>
+          <p:cNvSpPr/>
+          <p:nvPr/>
+        </p:nvSpPr>
+        <p:spPr>
+          <a:xfrm>
+            <a:off x="5252314" y="3621902"/>
+            <a:ext cx="53767" cy="147474"/>
+          </a:xfrm>
+          <a:prstGeom prst="roundRect">
+            <a:avLst>
+              <a:gd name="adj" fmla="val 50000"/>
+            </a:avLst>
+          </a:prstGeom>
+          <a:solidFill>
+            <a:srgbClr val="2F9E6E"/>
+          </a:solidFill>
+          <a:ln/>
+        </p:spPr>
+      </p:sp>
+      <p:sp>
+        <p:nvSpPr>
+          <p:cNvPr id="65" name="obj296"/>
+          <p:cNvSpPr/>
+          <p:nvPr/>
+        </p:nvSpPr>
+        <p:spPr>
+          <a:xfrm>
+            <a:off x="5037247" y="3741725"/>
+            <a:ext cx="276515" cy="211994"/>
+          </a:xfrm>
+          <a:prstGeom prst="roundRect">
+            <a:avLst>
+              <a:gd name="adj" fmla="val 28986"/>
+            </a:avLst>
+          </a:prstGeom>
+          <a:solidFill>
+            <a:srgbClr val="2F9E6E"/>
+          </a:solidFill>
+          <a:ln/>
+        </p:spPr>
+      </p:sp>
+      <p:sp>
+        <p:nvSpPr>
+          <p:cNvPr id="66" name="obj297"/>
+          <p:cNvSpPr txBox="1"/>
+          <p:nvPr/>
+        </p:nvSpPr>
+        <p:spPr>
+          <a:xfrm>
+            <a:off x="5422392" y="3529584"/>
+            <a:ext cx="365760" cy="457200"/>
+          </a:xfrm>
+          <a:prstGeom prst="rect">
+            <a:avLst/>
+          </a:prstGeom>
+          <a:noFill/>
+          <a:ln/>
+        </p:spPr>
+        <p:txBody>
+          <a:bodyPr wrap="square" lIns="0" tIns="0" rIns="0" bIns="0" rtlCol="0" anchor="ctr"/>
+          <a:lstStyle/>
+          <a:p>
+            <a:pPr algn="l" indent="0" marL="0">
+              <a:buNone/>
+            </a:pPr>
+            <a:r>
+              <a:rPr lang="en-US" sz="2400" b="1" dirty="0">
+                <a:solidFill>
+                  <a:srgbClr val="2F9E6E"/>
+                </a:solidFill>
+                <a:latin typeface="Calibri" pitchFamily="34" charset="0"/>
+                <a:ea typeface="Calibri" pitchFamily="34" charset="-122"/>
+                <a:cs typeface="Calibri" pitchFamily="34" charset="-120"/>
+              </a:rPr>
+              <a:t>4</a:t>
+            </a:r>
+            <a:endParaRPr lang="en-US" sz="2400" dirty="0"/>
+          </a:p>
+        </p:txBody>
+      </p:sp>
+      <p:sp>
+        <p:nvSpPr>
+          <p:cNvPr id="67" name="obj298"/>
+          <p:cNvSpPr txBox="1"/>
+          <p:nvPr/>
+        </p:nvSpPr>
+        <p:spPr>
+          <a:xfrm>
+            <a:off x="4892040" y="4014216"/>
+            <a:ext cx="822960" cy="228600"/>
+          </a:xfrm>
+          <a:prstGeom prst="rect">
+            <a:avLst/>
+          </a:prstGeom>
+          <a:noFill/>
+          <a:ln/>
+        </p:spPr>
+        <p:txBody>
+          <a:bodyPr wrap="square" lIns="0" tIns="0" rIns="0" bIns="0" rtlCol="0" anchor="t"/>
+          <a:lstStyle/>
+          <a:p>
+            <a:pPr algn="l" indent="0" marL="0">
+              <a:buNone/>
+            </a:pPr>
+            <a:r>
+              <a:rPr lang="en-US" sz="1000" dirty="0">
+                <a:solidFill>
+                  <a:srgbClr val="6B7280"/>
+                </a:solidFill>
+                <a:latin typeface="Calibri" pitchFamily="34" charset="0"/>
+                <a:ea typeface="Calibri" pitchFamily="34" charset="-122"/>
+                <a:cs typeface="Calibri" pitchFamily="34" charset="-120"/>
+              </a:rPr>
+              <a:t>Albert</a:t>
+            </a:r>
+            <a:endParaRPr lang="en-US" sz="1000" dirty="0"/>
+          </a:p>
+        </p:txBody>
+      </p:sp>
+      <p:sp>
+        <p:nvSpPr>
+          <p:cNvPr id="68" name="obj299"/>
+          <p:cNvSpPr/>
+          <p:nvPr/>
+        </p:nvSpPr>
+        <p:spPr>
+          <a:xfrm>
+            <a:off x="5886176" y="3585033"/>
+            <a:ext cx="53767" cy="184343"/>
+          </a:xfrm>
+          <a:prstGeom prst="roundRect">
+            <a:avLst>
+              <a:gd name="adj" fmla="val 50000"/>
+            </a:avLst>
+          </a:prstGeom>
+          <a:solidFill>
+            <a:srgbClr val="2F9E6E"/>
+          </a:solidFill>
+          <a:ln/>
+        </p:spPr>
+      </p:sp>
+      <p:sp>
+        <p:nvSpPr>
+          <p:cNvPr id="69" name="obj300"/>
+          <p:cNvSpPr/>
+          <p:nvPr/>
+        </p:nvSpPr>
+        <p:spPr>
+          <a:xfrm>
+            <a:off x="5955304" y="3566599"/>
+            <a:ext cx="53767" cy="202777"/>
+          </a:xfrm>
+          <a:prstGeom prst="roundRect">
+            <a:avLst>
+              <a:gd name="adj" fmla="val 50000"/>
+            </a:avLst>
+          </a:prstGeom>
+          <a:solidFill>
+            <a:srgbClr val="2F9E6E"/>
+          </a:solidFill>
+          <a:ln/>
+        </p:spPr>
+      </p:sp>
+      <p:sp>
+        <p:nvSpPr>
+          <p:cNvPr id="70" name="obj301"/>
+          <p:cNvSpPr/>
+          <p:nvPr/>
+        </p:nvSpPr>
+        <p:spPr>
+          <a:xfrm>
+            <a:off x="6024433" y="3585033"/>
+            <a:ext cx="53767" cy="184343"/>
+          </a:xfrm>
+          <a:prstGeom prst="roundRect">
+            <a:avLst>
+              <a:gd name="adj" fmla="val 50000"/>
+            </a:avLst>
+          </a:prstGeom>
+          <a:solidFill>
+            <a:srgbClr val="2F9E6E"/>
+          </a:solidFill>
+          <a:ln/>
+        </p:spPr>
+      </p:sp>
+      <p:sp>
+        <p:nvSpPr>
+          <p:cNvPr id="71" name="obj302"/>
+          <p:cNvSpPr/>
+          <p:nvPr/>
+        </p:nvSpPr>
+        <p:spPr>
+          <a:xfrm>
+            <a:off x="6093562" y="3621902"/>
+            <a:ext cx="53767" cy="147474"/>
+          </a:xfrm>
+          <a:prstGeom prst="roundRect">
+            <a:avLst>
+              <a:gd name="adj" fmla="val 50000"/>
+            </a:avLst>
+          </a:prstGeom>
+          <a:solidFill>
+            <a:srgbClr val="2F9E6E"/>
+          </a:solidFill>
+          <a:ln/>
+        </p:spPr>
+      </p:sp>
+      <p:sp>
+        <p:nvSpPr>
+          <p:cNvPr id="72" name="obj303"/>
+          <p:cNvSpPr/>
+          <p:nvPr/>
+        </p:nvSpPr>
+        <p:spPr>
+          <a:xfrm rot="-1920000">
+            <a:off x="5832409" y="3704856"/>
+            <a:ext cx="57607" cy="156692"/>
+          </a:xfrm>
+          <a:prstGeom prst="roundRect">
+            <a:avLst>
+              <a:gd name="adj" fmla="val 50000"/>
+            </a:avLst>
+          </a:prstGeom>
+          <a:solidFill>
+            <a:srgbClr val="2F9E6E"/>
+          </a:solidFill>
+          <a:ln/>
+        </p:spPr>
+      </p:sp>
+      <p:sp>
+        <p:nvSpPr>
+          <p:cNvPr id="73" name="obj304"/>
+          <p:cNvSpPr/>
+          <p:nvPr/>
+        </p:nvSpPr>
+        <p:spPr>
+          <a:xfrm>
+            <a:off x="5878495" y="3741725"/>
+            <a:ext cx="276515" cy="211994"/>
+          </a:xfrm>
+          <a:prstGeom prst="roundRect">
+            <a:avLst>
+              <a:gd name="adj" fmla="val 28986"/>
+            </a:avLst>
+          </a:prstGeom>
+          <a:solidFill>
+            <a:srgbClr val="2F9E6E"/>
+          </a:solidFill>
+          <a:ln/>
+        </p:spPr>
+      </p:sp>
+      <p:sp>
+        <p:nvSpPr>
+          <p:cNvPr id="74" name="obj305"/>
+          <p:cNvSpPr txBox="1"/>
+          <p:nvPr/>
+        </p:nvSpPr>
+        <p:spPr>
+          <a:xfrm>
+            <a:off x="6263640" y="3529584"/>
+            <a:ext cx="365760" cy="457200"/>
+          </a:xfrm>
+          <a:prstGeom prst="rect">
+            <a:avLst/>
+          </a:prstGeom>
+          <a:noFill/>
+          <a:ln/>
+        </p:spPr>
+        <p:txBody>
+          <a:bodyPr wrap="square" lIns="0" tIns="0" rIns="0" bIns="0" rtlCol="0" anchor="ctr"/>
+          <a:lstStyle/>
+          <a:p>
+            <a:pPr algn="l" indent="0" marL="0">
+              <a:buNone/>
+            </a:pPr>
+            <a:r>
+              <a:rPr lang="en-US" sz="2400" b="1" dirty="0">
+                <a:solidFill>
+                  <a:srgbClr val="2F9E6E"/>
+                </a:solidFill>
+                <a:latin typeface="Calibri" pitchFamily="34" charset="0"/>
+                <a:ea typeface="Calibri" pitchFamily="34" charset="-122"/>
+                <a:cs typeface="Calibri" pitchFamily="34" charset="-120"/>
+              </a:rPr>
+              <a:t>5</a:t>
+            </a:r>
+            <a:endParaRPr lang="en-US" sz="2400" dirty="0"/>
+          </a:p>
+        </p:txBody>
+      </p:sp>
+      <p:sp>
+        <p:nvSpPr>
+          <p:cNvPr id="75" name="obj306"/>
+          <p:cNvSpPr txBox="1"/>
+          <p:nvPr/>
+        </p:nvSpPr>
+        <p:spPr>
+          <a:xfrm>
+            <a:off x="5733288" y="4014216"/>
+            <a:ext cx="822960" cy="228600"/>
+          </a:xfrm>
+          <a:prstGeom prst="rect">
+            <a:avLst/>
+          </a:prstGeom>
+          <a:noFill/>
+          <a:ln/>
+        </p:spPr>
+        <p:txBody>
+          <a:bodyPr wrap="square" lIns="0" tIns="0" rIns="0" bIns="0" rtlCol="0" anchor="t"/>
+          <a:lstStyle/>
+          <a:p>
+            <a:pPr algn="l" indent="0" marL="0">
+              <a:buNone/>
+            </a:pPr>
+            <a:r>
+              <a:rPr lang="en-US" sz="1000" dirty="0">
+                <a:solidFill>
+                  <a:srgbClr val="6B7280"/>
+                </a:solidFill>
+                <a:latin typeface="Calibri" pitchFamily="34" charset="0"/>
+                <a:ea typeface="Calibri" pitchFamily="34" charset="-122"/>
+                <a:cs typeface="Calibri" pitchFamily="34" charset="-120"/>
+              </a:rPr>
+              <a:t>Anthony</a:t>
+            </a:r>
+            <a:endParaRPr lang="en-US" sz="1000" dirty="0"/>
+          </a:p>
+        </p:txBody>
+      </p:sp>
+      <p:sp>
+        <p:nvSpPr>
+          <p:cNvPr id="76" name="obj307"/>
+          <p:cNvSpPr/>
+          <p:nvPr/>
+        </p:nvSpPr>
+        <p:spPr>
+          <a:xfrm>
+            <a:off x="6727424" y="3585033"/>
+            <a:ext cx="53767" cy="184343"/>
+          </a:xfrm>
+          <a:prstGeom prst="roundRect">
+            <a:avLst>
+              <a:gd name="adj" fmla="val 50000"/>
+            </a:avLst>
+          </a:prstGeom>
+          <a:solidFill>
+            <a:srgbClr val="2F9E6E"/>
+          </a:solidFill>
+          <a:ln/>
+        </p:spPr>
+      </p:sp>
+      <p:sp>
+        <p:nvSpPr>
+          <p:cNvPr id="77" name="obj308"/>
+          <p:cNvSpPr/>
+          <p:nvPr/>
+        </p:nvSpPr>
+        <p:spPr>
+          <a:xfrm>
+            <a:off x="6796552" y="3566599"/>
+            <a:ext cx="53767" cy="202777"/>
+          </a:xfrm>
+          <a:prstGeom prst="roundRect">
+            <a:avLst>
+              <a:gd name="adj" fmla="val 50000"/>
+            </a:avLst>
+          </a:prstGeom>
+          <a:solidFill>
+            <a:srgbClr val="2F9E6E"/>
+          </a:solidFill>
+          <a:ln/>
+        </p:spPr>
+      </p:sp>
+      <p:sp>
+        <p:nvSpPr>
+          <p:cNvPr id="78" name="obj309"/>
+          <p:cNvSpPr/>
+          <p:nvPr/>
+        </p:nvSpPr>
+        <p:spPr>
+          <a:xfrm>
+            <a:off x="6865681" y="3585033"/>
+            <a:ext cx="53767" cy="184343"/>
+          </a:xfrm>
+          <a:prstGeom prst="roundRect">
+            <a:avLst>
+              <a:gd name="adj" fmla="val 50000"/>
+            </a:avLst>
+          </a:prstGeom>
+          <a:solidFill>
+            <a:srgbClr val="2F9E6E"/>
+          </a:solidFill>
+          <a:ln/>
+        </p:spPr>
+      </p:sp>
+      <p:sp>
+        <p:nvSpPr>
+          <p:cNvPr id="79" name="obj310"/>
+          <p:cNvSpPr/>
+          <p:nvPr/>
+        </p:nvSpPr>
+        <p:spPr>
+          <a:xfrm>
+            <a:off x="6934810" y="3621902"/>
+            <a:ext cx="53767" cy="147474"/>
+          </a:xfrm>
+          <a:prstGeom prst="roundRect">
+            <a:avLst>
+              <a:gd name="adj" fmla="val 50000"/>
+            </a:avLst>
+          </a:prstGeom>
+          <a:solidFill>
+            <a:srgbClr val="2F9E6E"/>
+          </a:solidFill>
+          <a:ln/>
+        </p:spPr>
+      </p:sp>
+      <p:sp>
+        <p:nvSpPr>
+          <p:cNvPr id="80" name="obj311"/>
+          <p:cNvSpPr/>
+          <p:nvPr/>
+        </p:nvSpPr>
+        <p:spPr>
+          <a:xfrm>
+            <a:off x="6719743" y="3741725"/>
+            <a:ext cx="276515" cy="211994"/>
+          </a:xfrm>
+          <a:prstGeom prst="roundRect">
+            <a:avLst>
+              <a:gd name="adj" fmla="val 28986"/>
+            </a:avLst>
+          </a:prstGeom>
+          <a:solidFill>
+            <a:srgbClr val="2F9E6E"/>
+          </a:solidFill>
+          <a:ln/>
+        </p:spPr>
+      </p:sp>
+      <p:sp>
+        <p:nvSpPr>
+          <p:cNvPr id="81" name="obj312"/>
+          <p:cNvSpPr txBox="1"/>
+          <p:nvPr/>
+        </p:nvSpPr>
+        <p:spPr>
+          <a:xfrm>
+            <a:off x="7104888" y="3529584"/>
+            <a:ext cx="365760" cy="457200"/>
+          </a:xfrm>
+          <a:prstGeom prst="rect">
+            <a:avLst/>
+          </a:prstGeom>
+          <a:noFill/>
+          <a:ln/>
+        </p:spPr>
+        <p:txBody>
+          <a:bodyPr wrap="square" lIns="0" tIns="0" rIns="0" bIns="0" rtlCol="0" anchor="ctr"/>
+          <a:lstStyle/>
+          <a:p>
+            <a:pPr algn="l" indent="0" marL="0">
+              <a:buNone/>
+            </a:pPr>
+            <a:r>
+              <a:rPr lang="en-US" sz="2400" b="1" dirty="0">
+                <a:solidFill>
+                  <a:srgbClr val="2F9E6E"/>
+                </a:solidFill>
+                <a:latin typeface="Calibri" pitchFamily="34" charset="0"/>
+                <a:ea typeface="Calibri" pitchFamily="34" charset="-122"/>
+                <a:cs typeface="Calibri" pitchFamily="34" charset="-120"/>
+              </a:rPr>
+              <a:t>4</a:t>
+            </a:r>
+            <a:endParaRPr lang="en-US" sz="2400" dirty="0"/>
+          </a:p>
+        </p:txBody>
+      </p:sp>
+      <p:sp>
+        <p:nvSpPr>
+          <p:cNvPr id="82" name="obj313"/>
+          <p:cNvSpPr txBox="1"/>
+          <p:nvPr/>
+        </p:nvSpPr>
+        <p:spPr>
+          <a:xfrm>
+            <a:off x="6574536" y="4014216"/>
+            <a:ext cx="822960" cy="228600"/>
+          </a:xfrm>
+          <a:prstGeom prst="rect">
+            <a:avLst/>
+          </a:prstGeom>
+          <a:noFill/>
+          <a:ln/>
+        </p:spPr>
+        <p:txBody>
+          <a:bodyPr wrap="square" lIns="0" tIns="0" rIns="0" bIns="0" rtlCol="0" anchor="t"/>
+          <a:lstStyle/>
+          <a:p>
+            <a:pPr algn="l" indent="0" marL="0">
+              <a:buNone/>
+            </a:pPr>
+            <a:r>
+              <a:rPr lang="en-US" sz="1000" dirty="0">
+                <a:solidFill>
+                  <a:srgbClr val="6B7280"/>
+                </a:solidFill>
+                <a:latin typeface="Calibri" pitchFamily="34" charset="0"/>
+                <a:ea typeface="Calibri" pitchFamily="34" charset="-122"/>
+                <a:cs typeface="Calibri" pitchFamily="34" charset="-120"/>
+              </a:rPr>
+              <a:t>Luis</a:t>
+            </a:r>
+            <a:endParaRPr lang="en-US" sz="1000" dirty="0"/>
+          </a:p>
+        </p:txBody>
+      </p:sp>
+      <p:sp>
+        <p:nvSpPr>
+          <p:cNvPr id="83" name="obj314"/>
+          <p:cNvSpPr/>
+          <p:nvPr/>
+        </p:nvSpPr>
+        <p:spPr>
+          <a:xfrm>
+            <a:off x="7498080" y="3584448"/>
+            <a:ext cx="1097280" cy="548640"/>
+          </a:xfrm>
+          <a:prstGeom prst="roundRect">
+            <a:avLst>
+              <a:gd name="adj" fmla="val 20000"/>
+            </a:avLst>
+          </a:prstGeom>
+          <a:solidFill>
+            <a:srgbClr val="2F9E6E">
+              <a:alpha val="18000"/>
+            </a:srgbClr>
+          </a:solidFill>
+          <a:ln/>
+        </p:spPr>
+      </p:sp>
+      <p:sp>
+        <p:nvSpPr>
+          <p:cNvPr id="84" name="obj315"/>
+          <p:cNvSpPr txBox="1"/>
+          <p:nvPr/>
+        </p:nvSpPr>
+        <p:spPr>
+          <a:xfrm>
+            <a:off x="7543800" y="3584448"/>
+            <a:ext cx="1005840" cy="548640"/>
+          </a:xfrm>
+          <a:prstGeom prst="rect">
+            <a:avLst/>
+          </a:prstGeom>
+          <a:noFill/>
+          <a:ln/>
+        </p:spPr>
+        <p:txBody>
+          <a:bodyPr wrap="square" lIns="0" tIns="0" rIns="0" bIns="0" rtlCol="0" anchor="ctr"/>
+          <a:lstStyle/>
+          <a:p>
+            <a:pPr algn="ctr" indent="0" marL="0">
+              <a:buNone/>
+            </a:pPr>
+            <a:r>
+              <a:rPr lang="en-US" sz="1050" b="1" dirty="0">
+                <a:solidFill>
+                  <a:srgbClr val="1F2421"/>
+                </a:solidFill>
+                <a:latin typeface="Calibri" pitchFamily="34" charset="0"/>
+                <a:ea typeface="Calibri" pitchFamily="34" charset="-122"/>
+                <a:cs typeface="Calibri" pitchFamily="34" charset="-120"/>
+              </a:rPr>
+              <a:t>Aprobado</a:t>
+            </a:r>
+            <a:endParaRPr lang="en-US" sz="1050" dirty="0"/>
+          </a:p>
+        </p:txBody>
+      </p:sp>
+      <p:sp>
+        <p:nvSpPr>
+          <p:cNvPr id="85" name="obj316"/>
+          <p:cNvSpPr txBox="1"/>
+          <p:nvPr/>
+        </p:nvSpPr>
+        <p:spPr>
+          <a:xfrm>
+            <a:off x="548640" y="4462272"/>
+            <a:ext cx="8046720" cy="256032"/>
+          </a:xfrm>
+          <a:prstGeom prst="rect">
+            <a:avLst/>
+          </a:prstGeom>
+          <a:noFill/>
+          <a:ln/>
+        </p:spPr>
+        <p:txBody>
+          <a:bodyPr wrap="square" lIns="0" tIns="0" rIns="0" bIns="0" rtlCol="0" anchor="t"/>
+          <a:lstStyle/>
+          <a:p>
+            <a:pPr algn="l" indent="0" marL="0">
+              <a:buNone/>
+            </a:pPr>
+            <a:r>
+              <a:rPr lang="en-US" sz="1100" b="1" dirty="0">
+                <a:solidFill>
+                  <a:srgbClr val="6B7280"/>
+                </a:solidFill>
+                <a:latin typeface="Calibri" pitchFamily="34" charset="0"/>
+                <a:ea typeface="Calibri" pitchFamily="34" charset="-122"/>
+                <a:cs typeface="Calibri" pitchFamily="34" charset="-120"/>
+              </a:rPr>
+              <a:t>Regla del equipo: </a:t>
+            </a:r>
+            <a:pPr algn="l" indent="0" marL="0">
+              <a:buNone/>
+            </a:pPr>
+            <a:r>
+              <a:rPr lang="en-US" sz="1100" dirty="0">
+                <a:solidFill>
+                  <a:srgbClr val="6B7280"/>
+                </a:solidFill>
+                <a:latin typeface="Calibri" pitchFamily="34" charset="0"/>
+                <a:ea typeface="Calibri" pitchFamily="34" charset="-122"/>
+                <a:cs typeface="Calibri" pitchFamily="34" charset="-120"/>
+              </a:rPr>
+              <a:t>si hay algún 1 o 2, se discute antes de cerrar. Votos simulados.</a:t>
+            </a:r>
+            <a:endParaRPr lang="en-US" sz="1100" dirty="0"/>
+          </a:p>
+        </p:txBody>
+      </p:sp>
+      <p:sp>
+        <p:nvSpPr>
+          <p:cNvPr id="25" name="Slide Number Placeholder 0"/>
+          <p:cNvSpPr>
+            <a:spLocks noGrp="1"/>
+          </p:cNvSpPr>
+          <p:nvPr>
+            <p:ph type="sldNum" sz="quarter" idx="4294967295"/>
+          </p:nvPr>
+        </p:nvSpPr>
+        <p:spPr>
+          <a:xfrm>
+            <a:off x="8138160" y="4754880"/>
+            <a:ext cx="457200" cy="228600"/>
+          </a:xfrm>
+          <a:prstGeom prst="rect">
+            <a:avLst/>
+          </a:prstGeom>
+          <a:extLst>
+            <a:ext uri="{C572A759-6A51-4108-AA02-DFA0A04FC94B}">
+              <ma14:wrappingTextBoxFlag xmlns:ma14="http://schemas.microsoft.com/office/mac/drawingml/2011/main" val="0"/>
+            </a:ext>
+          </a:extLst>
+        </p:spPr>
+        <p:txBody>
+          <a:bodyPr/>
+          <a:lstStyle>
+            <a:lvl1pPr>
+              <a:defRPr sz="900">
+                <a:solidFill>
+                  <a:srgbClr val="6B7280"/>
+                </a:solidFill>
+                <a:latin typeface="Calibri"/>
+                <a:ea typeface="Calibri"/>
+                <a:cs typeface="Calibri"/>
+              </a:defRPr>
+            </a:lvl1pPr>
+          </a:lstStyle>
+          <a:p>
+            <a:pPr algn="r"/>
+            <a:fld id="{F7021451-1387-4CA6-816F-3879F97B5CBC}" type="slidenum">
+              <a:rPr b="0" lang="en-US"/>
+              <a:t>7</a:t>
+            </a:fld>
+            <a:endParaRPr lang="en-US"/>
+          </a:p>
+        </p:txBody>
+      </p:sp>
+    </p:spTree>
+  </p:cSld>
+  <p:clrMapOvr>
+    <a:masterClrMapping/>
+  </p:clrMapOvr>
+</p:sld>
+</file>
+
+<file path=ppt/slides/slide8.xml><?xml version="1.0" encoding="utf-8"?>
+<p:sld xmlns:a="http://schemas.openxmlformats.org/drawingml/2006/main" xmlns:r="http://schemas.openxmlformats.org/officeDocument/2006/relationships" xmlns:p="http://schemas.openxmlformats.org/presentationml/2006/main">
+  <p:cSld name="Slide 8">
+    <p:spTree>
+      <p:nvGrpSpPr>
+        <p:cNvPr id="1" name=""/>
+        <p:cNvGrpSpPr/>
+        <p:nvPr/>
+      </p:nvGrpSpPr>
+      <p:grpSpPr>
+        <a:xfrm>
+          <a:off x="0" y="0"/>
+          <a:ext cx="0" cy="0"/>
+          <a:chOff x="0" y="0"/>
+          <a:chExt cx="0" cy="0"/>
+        </a:xfrm>
+      </p:grpSpPr>
+      <p:sp>
+        <p:nvSpPr>
+          <p:cNvPr id="2" name="Text 0"/>
+          <p:cNvSpPr/>
+          <p:nvPr>
+            <p:ph idx="100" type="title" hasCustomPrompt="1"/>
+          </p:nvPr>
+        </p:nvSpPr>
+        <p:spPr>
+          <a:xfrm>
+            <a:off x="548640" y="365760"/>
+            <a:ext cx="8046720" cy="640080"/>
+          </a:xfrm>
+          <a:prstGeom prst="rect">
+            <a:avLst/>
+          </a:prstGeom>
+          <a:noFill/>
+          <a:ln/>
+        </p:spPr>
+        <p:txBody>
+          <a:bodyPr wrap="square" lIns="0" tIns="0" rIns="0" bIns="0" rtlCol="0" anchor="ctr"/>
+          <a:lstStyle/>
+          <a:p>
+            <a:pPr algn="l" indent="0" marL="0">
+              <a:buNone/>
+            </a:pPr>
+            <a:r>
+              <a:rPr lang="en-US" sz="3000" b="1" dirty="0">
+                <a:solidFill>
+                  <a:srgbClr val="1F2421"/>
+                </a:solidFill>
+                <a:latin typeface="Calibri" pitchFamily="34" charset="0"/>
+                <a:ea typeface="Calibri" pitchFamily="34" charset="-122"/>
+                <a:cs typeface="Calibri" pitchFamily="34" charset="-120"/>
+              </a:rPr>
               <a:t>¿Cuándo usar el puño de cinco?</a:t>
             </a:r>
             <a:endParaRPr lang="en-US" sz="3000" dirty="0"/>
@@ -7249,7 +12214,7 @@
       </p:sp>
       <p:graphicFrame>
         <p:nvGraphicFramePr>
-          <p:cNvPr id="7" name="obj172"/>
+          <p:cNvPr id="9" name="obj317"/>
           <p:cNvGraphicFramePr>
             <a:graphicFrameLocks noGrp="1"/>
           </p:cNvGraphicFramePr>
@@ -8310,7 +13275,7 @@
       </p:graphicFrame>
       <p:sp>
         <p:nvSpPr>
-          <p:cNvPr id="4" name="obj173"/>
+          <p:cNvPr id="4" name="obj318"/>
           <p:cNvSpPr/>
           <p:nvPr/>
         </p:nvSpPr>
@@ -8332,7 +13297,7 @@
       </p:sp>
       <p:sp>
         <p:nvSpPr>
-          <p:cNvPr id="5" name="obj174"/>
+          <p:cNvPr id="5" name="obj319"/>
           <p:cNvSpPr/>
           <p:nvPr/>
         </p:nvSpPr>
@@ -8354,7 +13319,7 @@
       </p:sp>
       <p:sp>
         <p:nvSpPr>
-          <p:cNvPr id="6" name="obj175"/>
+          <p:cNvPr id="6" name="obj320"/>
           <p:cNvSpPr/>
           <p:nvPr/>
         </p:nvSpPr>
@@ -8376,7 +13341,7 @@
       </p:sp>
       <p:sp>
         <p:nvSpPr>
-          <p:cNvPr id="7" name="obj176"/>
+          <p:cNvPr id="7" name="obj321"/>
           <p:cNvSpPr/>
           <p:nvPr/>
         </p:nvSpPr>
@@ -8398,7 +13363,7 @@
       </p:sp>
       <p:sp>
         <p:nvSpPr>
-          <p:cNvPr id="8" name="obj177"/>
+          <p:cNvPr id="8" name="obj322"/>
           <p:cNvSpPr/>
           <p:nvPr/>
         </p:nvSpPr>
@@ -8420,7 +13385,7 @@
       </p:sp>
       <p:sp>
         <p:nvSpPr>
-          <p:cNvPr id="9" name="obj178"/>
+          <p:cNvPr id="9" name="obj323"/>
           <p:cNvSpPr/>
           <p:nvPr/>
         </p:nvSpPr>
@@ -8442,7 +13407,7 @@
       </p:sp>
       <p:sp>
         <p:nvSpPr>
-          <p:cNvPr id="10" name="obj179"/>
+          <p:cNvPr id="10" name="obj324"/>
           <p:cNvSpPr/>
           <p:nvPr/>
         </p:nvSpPr>
@@ -8464,7 +13429,7 @@
       </p:sp>
       <p:sp>
         <p:nvSpPr>
-          <p:cNvPr id="11" name="obj180"/>
+          <p:cNvPr id="11" name="obj325"/>
           <p:cNvSpPr txBox="1"/>
           <p:nvPr/>
         </p:nvSpPr>
@@ -8503,7 +13468,7 @@
       </p:sp>
       <p:sp>
         <p:nvSpPr>
-          <p:cNvPr id="12" name="obj181"/>
+          <p:cNvPr id="12" name="obj326"/>
           <p:cNvSpPr txBox="1"/>
           <p:nvPr/>
         </p:nvSpPr>
@@ -8610,7 +13575,7 @@
             <a:pPr algn="r"/>
             <a:fld id="{F7021451-1387-4CA6-816F-3879F97B5CBC}" type="slidenum">
               <a:rPr b="0" lang="en-US"/>
-              <a:t>6</a:t>
+              <a:t>8</a:t>
             </a:fld>
             <a:endParaRPr lang="en-US"/>
           </a:p>
